--- a/docs/2026-2학기-통계독서탐구-수행평가/발표예시-공학.pptx
+++ b/docs/2026-2학기-통계독서탐구-수행평가/발표예시-공학.pptx
@@ -114,7 +114,7 @@
   <p:extLst>
     <p:ext uri="{521415D9-36F7-43E2-AB2F-B90AF26B5E84}">
       <p14:sectionLst xmlns:p14="http://schemas.microsoft.com/office/powerpoint/2010/main">
-        <p14:section name="발표" id="{56e5229d-8b16-88c6-eb28-3afba5ca421d}">
+        <p14:section name="발표" id="{a8803e43-1e7b-a24d-4cfd-daf12399e09f}">
           <p14:sldIdLst>
             <p14:sldId id="256"/>
             <p14:sldId id="257"/>

--- a/docs/2026-2학기-통계독서탐구-수행평가/발표예시-공학.pptx
+++ b/docs/2026-2학기-통계독서탐구-수행평가/발표예시-공학.pptx
@@ -114,7 +114,7 @@
   <p:extLst>
     <p:ext uri="{521415D9-36F7-43E2-AB2F-B90AF26B5E84}">
       <p14:sectionLst xmlns:p14="http://schemas.microsoft.com/office/powerpoint/2010/main">
-        <p14:section name="발표" id="{a8803e43-1e7b-a24d-4cfd-daf12399e09f}">
+        <p14:section name="발표" id="{b9b60ea2-6f80-f3f2-db00-c6a15a172bd4}">
           <p14:sldIdLst>
             <p14:sldId id="256"/>
             <p14:sldId id="257"/>
@@ -3533,7 +3533,7 @@
                   <a:schemeClr val="tx1"/>
                 </a:solidFill>
               </a:rPr>
-              <a:t>1번 도서 20점: 도서명·저자 + 이어지는 내용</a:t>
+              <a:t>1번 도서 20점: 도서명·저자 + 책을 어떻게 썼는지 핵심</a:t>
             </a:r>
             <a:endParaRPr lang="en-US" sz="1050" dirty="0"/>
           </a:p>
@@ -3735,11 +3735,11 @@
         <p:spPr>
           <a:xfrm>
             <a:off x="457200" y="960120"/>
-            <a:ext cx="8229600" cy="868680"/>
+            <a:ext cx="8229600" cy="1051560"/>
           </a:xfrm>
           <a:prstGeom prst="roundRect">
             <a:avLst>
-              <a:gd name="adj" fmla="val 8421"/>
+              <a:gd name="adj" fmla="val 6957"/>
             </a:avLst>
           </a:prstGeom>
           <a:solidFill>
@@ -3761,8 +3761,8 @@
         </p:nvSpPr>
         <p:spPr>
           <a:xfrm>
-            <a:off x="640080" y="1024128"/>
-            <a:ext cx="7863840" cy="749808"/>
+            <a:off x="640080" y="1005840"/>
+            <a:ext cx="7863840" cy="960120"/>
           </a:xfrm>
           <a:prstGeom prst="rect">
             <a:avLst/>
@@ -3805,7 +3805,7 @@
                   <a:schemeClr val="tx1"/>
                 </a:solidFill>
               </a:rPr>
-              <a:t>대상: 등록된 모든 자동차(매월 말 집계, 여기서는 연말 값)</a:t>
+              <a:t>대상: 등록된 모든 자동차(매월 말 집계, 여기서는 연말 값) → 모두 조사(전수). 등록 자료를 집계한 보고통계</a:t>
             </a:r>
             <a:endParaRPr lang="en-US" sz="1100" dirty="0"/>
           </a:p>
@@ -3822,7 +3822,7 @@
                   <a:schemeClr val="tx1"/>
                 </a:solidFill>
               </a:rPr>
-              <a:t>조사 방식: 모두 조사(전수). 등록 자료를 집계한 보고통계라 표본 오차가 없다</a:t>
+              <a:t>얻는 길: index.go.kr(e-나라지표) → '자동차 등록현황' → 연료별  (또는 kosis.kr → 교통·물류 → 자동차등록현황보고, stat.molit.go.kr)</a:t>
             </a:r>
             <a:endParaRPr lang="en-US" sz="1100" dirty="0"/>
           </a:p>
@@ -3836,7 +3836,7 @@
         </p:nvSpPr>
         <p:spPr>
           <a:xfrm>
-            <a:off x="457200" y="1901952"/>
+            <a:off x="457200" y="2084832"/>
             <a:ext cx="4114800" cy="274320"/>
           </a:xfrm>
           <a:prstGeom prst="rect">
@@ -3879,7 +3879,7 @@
           </p:nvPr>
         </p:nvGraphicFramePr>
         <p:xfrm>
-          <a:off x="457200" y="2176272"/>
+          <a:off x="457200" y="2359152"/>
           <a:ext cx="4114800" cy="914400"/>
         </p:xfrm>
         <a:graphic>
@@ -6784,7 +6784,7 @@
         </p:nvSpPr>
         <p:spPr>
           <a:xfrm>
-            <a:off x="457200" y="3822192"/>
+            <a:off x="457200" y="4005072"/>
             <a:ext cx="4114800" cy="457200"/>
           </a:xfrm>
           <a:prstGeom prst="rect">
@@ -6820,7 +6820,7 @@
         </p:nvSpPr>
         <p:spPr>
           <a:xfrm>
-            <a:off x="4572000" y="2651760"/>
+            <a:off x="4572000" y="2834640"/>
             <a:ext cx="457200" cy="457200"/>
           </a:xfrm>
           <a:prstGeom prst="rect">
@@ -6858,7 +6858,7 @@
         </p:nvSpPr>
         <p:spPr>
           <a:xfrm>
-            <a:off x="5029200" y="1901952"/>
+            <a:off x="5029200" y="2084832"/>
             <a:ext cx="3657600" cy="274320"/>
           </a:xfrm>
           <a:prstGeom prst="rect">
@@ -6901,7 +6901,7 @@
           </p:nvPr>
         </p:nvGraphicFramePr>
         <p:xfrm>
-          <a:off x="5029200" y="2176272"/>
+          <a:off x="5029200" y="2359152"/>
           <a:ext cx="3657600" cy="914400"/>
         </p:xfrm>
         <a:graphic>
@@ -8166,7 +8166,7 @@
         </p:nvSpPr>
         <p:spPr>
           <a:xfrm>
-            <a:off x="5029200" y="3886200"/>
+            <a:off x="5029200" y="4069080"/>
             <a:ext cx="3657600" cy="548640"/>
           </a:xfrm>
           <a:prstGeom prst="rect">
@@ -8545,7 +8545,7 @@
                   <a:schemeClr val="tx2"/>
                 </a:solidFill>
               </a:rPr>
-              <a:t>얻는 길</a:t>
+              <a:t>얻는 길 (링크)</a:t>
             </a:r>
             <a:endParaRPr lang="en-US" sz="1150" dirty="0"/>
           </a:p>
@@ -8587,7 +8587,7 @@
                   <a:schemeClr val="tx1"/>
                 </a:solidFill>
               </a:rPr>
-              <a:t>e-나라지표(index.go.kr) → '자동차 등록현황' → 연료별</a:t>
+              <a:t>index.go.kr → '자동차 등록현황' → 연료별 (e-나라지표, 연도별 표가 바로 나온다)</a:t>
             </a:r>
             <a:endParaRPr lang="en-US" sz="1050" dirty="0"/>
           </a:p>
@@ -8605,7 +8605,7 @@
                   <a:schemeClr val="tx1"/>
                 </a:solidFill>
               </a:rPr>
-              <a:t>또는 KOSIS → 교통·물류 → 자동차등록현황보고</a:t>
+              <a:t>kosis.kr → 교통·물류 → 자동차등록현황보고</a:t>
             </a:r>
             <a:endParaRPr lang="en-US" sz="1050" dirty="0"/>
           </a:p>
@@ -8623,7 +8623,7 @@
                   <a:schemeClr val="tx1"/>
                 </a:solidFill>
               </a:rPr>
-              <a:t>국토교통부 통계누리(stat.molit.go.kr)에 월별 표</a:t>
+              <a:t>stat.molit.go.kr(국토교통 통계누리) → 자동차 등록 → 월별 표</a:t>
             </a:r>
             <a:endParaRPr lang="en-US" sz="1050" dirty="0"/>
           </a:p>
@@ -8869,7 +8869,7 @@
                   <a:schemeClr val="tx1"/>
                 </a:solidFill>
               </a:rPr>
-              <a:t>2-① 기관·조사 이름</a:t>
+              <a:t>출처(기관·조사 이름·링크)를 표현했는가</a:t>
             </a:r>
             <a:endParaRPr lang="en-US" sz="1050" dirty="0"/>
           </a:p>
@@ -8887,7 +8887,7 @@
                   <a:schemeClr val="tx1"/>
                 </a:solidFill>
               </a:rPr>
-              <a:t>2-② 전수의 근거: '등록 자료 전체', '보고통계'</a:t>
+              <a:t>모두 조사인지 밝혔는가: '등록 자료 전체', '보고통계'</a:t>
             </a:r>
             <a:endParaRPr lang="en-US" sz="1050" dirty="0"/>
           </a:p>
@@ -8905,7 +8905,7 @@
                   <a:schemeClr val="tx1"/>
                 </a:solidFill>
               </a:rPr>
-              <a:t>2-③ 직접 계산한 열도 표에 넣을 수 있다</a:t>
+              <a:t>가공 전·후를 보였고 직접 계산한 열도 넣었는가</a:t>
             </a:r>
             <a:endParaRPr lang="en-US" sz="1050" dirty="0"/>
           </a:p>
@@ -9270,7 +9270,7 @@
                   <a:schemeClr val="tx2"/>
                 </a:solidFill>
               </a:rPr>
-              <a:t>② 왜 그렇게 되었을까, 내 의견</a:t>
+              <a:t>② 의견 또는 추측</a:t>
             </a:r>
             <a:endParaRPr lang="en-US" sz="1000" dirty="0"/>
           </a:p>
@@ -9308,7 +9308,7 @@
                   <a:schemeClr val="tx1"/>
                 </a:solidFill>
               </a:rPr>
-              <a:t>보조금이 줄어도 차종과 충전기가 늘어 해마다 비슷한 수가 새로 들어온다. 2025년에는 가장 많이 늘었다</a:t>
+              <a:t>이렇게 쌓인 전기차의 배터리는 보증이 끝나는 8~10년 뒤부터 점검·교체·재활용 대상이 된다. 2030년 전후부터 해마다 10만 개가 넘는 배터리가 나와, 정비·재활용 인력이 부족해질 것이라고 추측한다</a:t>
             </a:r>
             <a:endParaRPr lang="en-US" sz="950" dirty="0"/>
           </a:p>
@@ -9371,7 +9371,7 @@
                   <a:schemeClr val="tx2"/>
                 </a:solidFill>
               </a:rPr>
-              <a:t>③ 내 의견의 근거</a:t>
+              <a:t>③ 의견·추측의 근거</a:t>
             </a:r>
             <a:endParaRPr lang="en-US" sz="1000" dirty="0"/>
           </a:p>
@@ -9409,7 +9409,7 @@
                   <a:schemeClr val="tx1"/>
                 </a:solidFill>
               </a:rPr>
-              <a:t>배터리 보증은 보통 8~10년(현대·기아 10년/20만 km, 테슬라 8년/16만 km). 2020~2023년에 등록된 54.4만 대의 보증이 2028~2033년에 끝난다</a:t>
+              <a:t>제조사 보증은 8~10년(현대·기아 10년/20만 km, 테슬라 8년/16만 km). 보증이 끝나는 배터리 수 = 8~10년 전 그해 등록 대수: 2021년 9.6만, 2022년 15.9만, 2023년 15.4만 대</a:t>
             </a:r>
             <a:endParaRPr lang="en-US" sz="950" dirty="0"/>
           </a:p>
@@ -9925,7 +9925,7 @@
                   <a:schemeClr val="tx2"/>
                 </a:solidFill>
               </a:rPr>
-              <a:t>근거 자료는 어디서</a:t>
+              <a:t>의견과 근거를 잇는 법</a:t>
             </a:r>
             <a:endParaRPr lang="en-US" sz="1150" dirty="0"/>
           </a:p>
@@ -9967,7 +9967,7 @@
                   <a:schemeClr val="tx1"/>
                 </a:solidFill>
               </a:rPr>
-              <a:t>제조사 누리집의 보증 안내(고전압 배터리: 현대·기아 10년/20만 km, 테슬라 8년/16만 km)</a:t>
+              <a:t>②는 숫자를 보고 든 추측: '보증이 끝나는 배터리가 쏟아져 인력이 부족해진다'</a:t>
             </a:r>
             <a:endParaRPr lang="en-US" sz="1050" dirty="0"/>
           </a:p>
@@ -9985,7 +9985,25 @@
                   <a:schemeClr val="tx1"/>
                 </a:solidFill>
               </a:rPr>
-              <a:t>보증 종료 = 점검·교체·재활용 수요의 시작</a:t>
+              <a:t>③은 그 추측의 근거: 보증 기간(제조사 안내) + 그해 등록 대수(표 2)</a:t>
+            </a:r>
+            <a:endParaRPr lang="en-US" sz="1050" dirty="0"/>
+          </a:p>
+          <a:p>
+            <a:pPr marL="342900" indent="-342900">
+              <a:spcAft>
+                <a:spcPts val="300"/>
+              </a:spcAft>
+              <a:buSzPct val="100000"/>
+              <a:buChar char="•"/>
+            </a:pPr>
+            <a:r>
+              <a:rPr lang="en-US" sz="1050" dirty="0">
+                <a:solidFill>
+                  <a:schemeClr val="tx1"/>
+                </a:solidFill>
+              </a:rPr>
+              <a:t>보증 만료 수 = 8~10년 전 등록 대수라는 계산으로 둘을 잇는다</a:t>
             </a:r>
             <a:endParaRPr lang="en-US" sz="1050" dirty="0"/>
           </a:p>
@@ -10090,7 +10108,7 @@
                   <a:schemeClr val="tx1"/>
                 </a:solidFill>
               </a:rPr>
-              <a:t>2-④ 세로축 0부터, 제목·단위</a:t>
+              <a:t>늘고 준 것을 숫자로 표현했는가(①)</a:t>
             </a:r>
             <a:endParaRPr lang="en-US" sz="1050" dirty="0"/>
           </a:p>
@@ -10108,7 +10126,7 @@
                   <a:schemeClr val="tx1"/>
                 </a:solidFill>
               </a:rPr>
-              <a:t>3-① 차이·배와 해마다의 증가 대수  3-② 의견</a:t>
+              <a:t>가공된 자료로 의견 도출 또는 추측을 했는가(②)</a:t>
             </a:r>
             <a:endParaRPr lang="en-US" sz="1050" dirty="0"/>
           </a:p>
@@ -10126,7 +10144,7 @@
                   <a:schemeClr val="tx1"/>
                 </a:solidFill>
               </a:rPr>
-              <a:t>3-③ 출처가 있는 근거(보증 기간)</a:t>
+              <a:t>의견·추측의 근거가 있는가(③, 제조사 보증 안내)</a:t>
             </a:r>
             <a:endParaRPr lang="en-US" sz="1050" dirty="0"/>
           </a:p>
@@ -10459,7 +10477,7 @@
                   <a:schemeClr val="tx2"/>
                 </a:solidFill>
               </a:rPr>
-              <a:t>그래서 나의 주장</a:t>
+              <a:t>통계 분석</a:t>
             </a:r>
             <a:endParaRPr lang="en-US" sz="1100" dirty="0"/>
           </a:p>
@@ -10497,7 +10515,7 @@
                   <a:schemeClr val="tx1"/>
                 </a:solidFill>
               </a:rPr>
-              <a:t>해마다 15만 대씩 늘면 2030년 누적은 약 165만 대가 된다. 2030년 전후부터는 보증이 끝나는 배터리가 해마다 10만 개를 넘는다(2021년 9.6만, 2022년 15.9만 대 등록분). 배터리를 진단·수리·재활용하는 기술자가 지금보다 훨씬 많이 필요하다.</a:t>
+              <a:t>해마다 15.1만 대(2022~2024년 평균)씩 늘면 2030년 누적은 약 165만 대다. 보증이 끝나는 배터리는 2030년 전후부터 해마다 10만 개를 넘고(2021년 9.6만, 2022년 15.9만 대 등록분) 그 뒤로도 줄지 않는다. 배터리를 진단·수리·재활용하는 기술자가 지금보다 훨씬 많이 필요하다.</a:t>
             </a:r>
             <a:endParaRPr lang="en-US" sz="1300" dirty="0"/>
           </a:p>
@@ -10560,7 +10578,7 @@
                   <a:schemeClr val="tx2"/>
                 </a:solidFill>
               </a:rPr>
-              <a:t>제안</a:t>
+              <a:t>결론</a:t>
             </a:r>
             <a:endParaRPr lang="en-US" sz="1100" dirty="0"/>
           </a:p>
@@ -10598,7 +10616,7 @@
                   <a:schemeClr val="tx1"/>
                 </a:solidFill>
               </a:rPr>
-              <a:t>나는 배터리 공학(전기·화학)을 전공한다. 학교 진로 시간에 전기차 정비·배터리 재활용 직업을 소개하는 자료를 만들어 공유하겠다.</a:t>
+              <a:t>나는 배터리 공학(전기·화학공학과) 진학을 희망한다. 학교 진로 시간에 전기차 정비·배터리 재활용 직업을 소개하는 자료를 만들어 공유하겠다.</a:t>
             </a:r>
             <a:endParaRPr lang="en-US" sz="1300" dirty="0"/>
           </a:p>
@@ -10874,7 +10892,7 @@
                   <a:schemeClr val="tx1"/>
                 </a:solidFill>
               </a:rPr>
-              <a:t>보여 준 것(숫자) → 주장(전망 + 수요) → 제안(내가 할 일)</a:t>
+              <a:t>통계가 보여 준 것(숫자) → 통계 분석(전망 + 수요) → 결론(내가 할 일)</a:t>
             </a:r>
             <a:endParaRPr lang="en-US" sz="1050" dirty="0"/>
           </a:p>
@@ -10892,7 +10910,7 @@
                   <a:schemeClr val="tx1"/>
                 </a:solidFill>
               </a:rPr>
-              <a:t>주장에 '2030년 약 165만 대', '해마다 10만 개 이상'처럼 숫자를 넣었다</a:t>
+              <a:t>통계 분석에 '2030년 약 165만 대', '해마다 10만 개 이상'처럼 숫자를 넣었다</a:t>
             </a:r>
             <a:endParaRPr lang="en-US" sz="1050" dirty="0"/>
           </a:p>

--- a/docs/2026-2학기-통계독서탐구-수행평가/발표예시-공학.pptx
+++ b/docs/2026-2학기-통계독서탐구-수행평가/발표예시-공학.pptx
@@ -114,7 +114,7 @@
   <p:extLst>
     <p:ext uri="{521415D9-36F7-43E2-AB2F-B90AF26B5E84}">
       <p14:sectionLst xmlns:p14="http://schemas.microsoft.com/office/powerpoint/2010/main">
-        <p14:section name="발표" id="{b9b60ea2-6f80-f3f2-db00-c6a15a172bd4}">
+        <p14:section name="발표" id="{29ab2904-9819-472c-2582-bb2727510b3d}">
           <p14:sldIdLst>
             <p14:sldId id="256"/>
             <p14:sldId id="257"/>
@@ -2852,7 +2852,7 @@
                   <a:schemeClr val="tx1"/>
                 </a:solidFill>
               </a:rPr>
-              <a:t>증가율 하나로 미래를 과장하지 말라는 경고를 따라, '몇 %'가 아니라 '해마다 몇 대'를 봤다</a:t>
+              <a:t>증가율로 미래를 과장하지 말라는 조언을 따라 '몇 %'가 아니라 '해마다 몇 대'를 직접 계산해 봤다</a:t>
             </a:r>
             <a:endParaRPr lang="en-US" sz="1150" dirty="0"/>
           </a:p>
@@ -3128,7 +3128,7 @@
                   <a:schemeClr val="tx1"/>
                 </a:solidFill>
               </a:rPr>
-              <a:t>주장 한 문장과 참고 도서 한 권</a:t>
+              <a:t>통계로 받친 주장 한 문장 + 통계 활동에 조언을 얻은 책 한 권</a:t>
             </a:r>
             <a:endParaRPr lang="en-US" sz="1050" dirty="0"/>
           </a:p>
@@ -3227,7 +3227,7 @@
                   <a:schemeClr val="tx2"/>
                 </a:solidFill>
               </a:rPr>
-              <a:t>책과의 연결</a:t>
+              <a:t>책에서 얻은 조언 (통계 활동용)</a:t>
             </a:r>
             <a:endParaRPr lang="en-US" sz="1150" dirty="0"/>
           </a:p>
@@ -3269,7 +3269,7 @@
                   <a:schemeClr val="tx1"/>
                 </a:solidFill>
               </a:rPr>
-              <a:t>스밀은 에너지·자동차의 큰 흐름을 숫자로 잰다</a:t>
+              <a:t>조언: 초기의 높은 증가율을 미래로 늘려 잡지 말라 → 증가율 대신 그해 증가 대수를 계산(2장)</a:t>
             </a:r>
             <a:endParaRPr lang="en-US" sz="1050" dirty="0"/>
           </a:p>
@@ -3287,7 +3287,7 @@
                   <a:schemeClr val="tx1"/>
                 </a:solidFill>
               </a:rPr>
-              <a:t>초기의 높은 증가율을 미래로 늘려 잡지 말라 → 증가율 대신 증가 대수를 계산했다</a:t>
+              <a:t>그래프 세로축을 0부터 그린 것도 같은 조언(3장)</a:t>
             </a:r>
             <a:endParaRPr lang="en-US" sz="1050" dirty="0"/>
           </a:p>
@@ -3305,7 +3305,7 @@
                   <a:schemeClr val="tx1"/>
                 </a:solidFill>
               </a:rPr>
-              <a:t>그래프 세로축을 0부터 그린 것도 같은 이유</a:t>
+              <a:t>주장은 책이 아니라 등록 통계에서 나왔다</a:t>
             </a:r>
             <a:endParaRPr lang="en-US" sz="1050" dirty="0"/>
           </a:p>
@@ -3533,7 +3533,7 @@
                   <a:schemeClr val="tx1"/>
                 </a:solidFill>
               </a:rPr>
-              <a:t>1번 도서 20점: 도서명·저자 + 책을 어떻게 썼는지 핵심</a:t>
+              <a:t>1번 도서 20점: 도서명·저자 + 통계 활동에 얻은 조언</a:t>
             </a:r>
             <a:endParaRPr lang="en-US" sz="1050" dirty="0"/>
           </a:p>
@@ -3551,7 +3551,7 @@
                   <a:schemeClr val="tx1"/>
                 </a:solidFill>
               </a:rPr>
-              <a:t>책의 경고가 2장·3장의 계산 방식으로 이어지면 충분하다</a:t>
+              <a:t>책의 조언이 2장·3장의 계산 방식에 쓰였으면 충분하다</a:t>
             </a:r>
             <a:endParaRPr lang="en-US" sz="1050" dirty="0"/>
           </a:p>

--- a/docs/2026-2학기-통계독서탐구-수행평가/발표예시-공학.pptx
+++ b/docs/2026-2학기-통계독서탐구-수행평가/발표예시-공학.pptx
@@ -9,13 +9,9 @@
     <p:sldId id="257" r:id="rId3"/>
     <p:sldId id="258" r:id="rId4"/>
     <p:sldId id="259" r:id="rId5"/>
-    <p:sldId id="260" r:id="rId6"/>
-    <p:sldId id="261" r:id="rId7"/>
-    <p:sldId id="262" r:id="rId8"/>
-    <p:sldId id="263" r:id="rId9"/>
   </p:sldIdLst>
   <p:notesMasterIdLst>
-    <p:notesMasterId r:id="rId10"/>
+    <p:notesMasterId r:id="rId6"/>
   </p:notesMasterIdLst>
   <p:sldSz cx="9144000" cy="5143500"/>
   <p:notesSz cx="5143500" cy="9144000"/>
@@ -114,16 +110,12 @@
   <p:extLst>
     <p:ext uri="{521415D9-36F7-43E2-AB2F-B90AF26B5E84}">
       <p14:sectionLst xmlns:p14="http://schemas.microsoft.com/office/powerpoint/2010/main">
-        <p14:section name="발표" id="{29ab2904-9819-472c-2582-bb2727510b3d}">
+        <p14:section name="발표" id="{545fdb77-b23d-0a63-f9cf-2e0afbf1121d}">
           <p14:sldIdLst>
             <p14:sldId id="256"/>
             <p14:sldId id="257"/>
             <p14:sldId id="258"/>
             <p14:sldId id="259"/>
-            <p14:sldId id="260"/>
-            <p14:sldId id="261"/>
-            <p14:sldId id="262"/>
-            <p14:sldId id="263"/>
           </p14:sldIdLst>
         </p14:section>
       </p14:sectionLst>
@@ -1410,358 +1402,6 @@
 </p:notes>
 </file>
 
-<file path=ppt/notesSlides/notesSlide5.xml><?xml version="1.0" encoding="utf-8"?>
-<p:notes xmlns:a="http://schemas.openxmlformats.org/drawingml/2006/main" xmlns:r="http://schemas.openxmlformats.org/officeDocument/2006/relationships" xmlns:p="http://schemas.openxmlformats.org/presentationml/2006/main">
-  <p:cSld>
-    <p:spTree>
-      <p:nvGrpSpPr>
-        <p:cNvPr id="1" name=""/>
-        <p:cNvGrpSpPr/>
-        <p:nvPr/>
-      </p:nvGrpSpPr>
-      <p:grpSpPr>
-        <a:xfrm>
-          <a:off x="0" y="0"/>
-          <a:ext cx="0" cy="0"/>
-          <a:chOff x="0" y="0"/>
-          <a:chExt cx="0" cy="0"/>
-        </a:xfrm>
-      </p:grpSpPr>
-      <p:sp>
-        <p:nvSpPr>
-          <p:cNvPr id="2" name="Slide Image Placeholder 1"/>
-          <p:cNvSpPr>
-            <a:spLocks noGrp="1" noRot="1" noChangeAspect="1"/>
-          </p:cNvSpPr>
-          <p:nvPr>
-            <p:ph type="sldImg"/>
-          </p:nvPr>
-        </p:nvSpPr>
-        <p:spPr/>
-      </p:sp>
-      <p:sp>
-        <p:nvSpPr>
-          <p:cNvPr id="3" name="Notes Placeholder 2"/>
-          <p:cNvSpPr>
-            <a:spLocks noGrp="1"/>
-          </p:cNvSpPr>
-          <p:nvPr>
-            <p:ph type="body" idx="1"/>
-          </p:nvPr>
-        </p:nvSpPr>
-        <p:spPr/>
-        <p:txBody>
-          <a:bodyPr/>
-          <a:lstStyle/>
-          <a:p>
-            <a:r>
-              <a:rPr lang="en-US" dirty="0"/>
-              <a:t/>
-            </a:r>
-            <a:endParaRPr lang="en-US" dirty="0"/>
-          </a:p>
-        </p:txBody>
-      </p:sp>
-      <p:sp>
-        <p:nvSpPr>
-          <p:cNvPr id="4" name="Slide Number Placeholder 3"/>
-          <p:cNvSpPr>
-            <a:spLocks noGrp="1"/>
-          </p:cNvSpPr>
-          <p:nvPr>
-            <p:ph type="sldNum" sz="quarter" idx="10"/>
-          </p:nvPr>
-        </p:nvSpPr>
-        <p:spPr/>
-        <p:txBody>
-          <a:bodyPr/>
-          <a:lstStyle/>
-          <a:p>
-            <a:fld id="{F7021451-1387-4CA6-816F-3879F97B5CBC}" type="slidenum">
-              <a:rPr lang="en-US"/>
-              <a:t>5</a:t>
-            </a:fld>
-            <a:endParaRPr lang="en-US"/>
-          </a:p>
-        </p:txBody>
-      </p:sp>
-    </p:spTree>
-    <p:extLst>
-      <p:ext uri="{BB962C8B-B14F-4D97-AF65-F5344CB8AC3E}">
-        <p14:creationId xmlns:p14="http://schemas.microsoft.com/office/powerpoint/2010/main" val="1024086991"/>
-      </p:ext>
-    </p:extLst>
-  </p:cSld>
-  <p:clrMapOvr>
-    <a:masterClrMapping/>
-  </p:clrMapOvr>
-</p:notes>
-</file>
-
-<file path=ppt/notesSlides/notesSlide6.xml><?xml version="1.0" encoding="utf-8"?>
-<p:notes xmlns:a="http://schemas.openxmlformats.org/drawingml/2006/main" xmlns:r="http://schemas.openxmlformats.org/officeDocument/2006/relationships" xmlns:p="http://schemas.openxmlformats.org/presentationml/2006/main">
-  <p:cSld>
-    <p:spTree>
-      <p:nvGrpSpPr>
-        <p:cNvPr id="1" name=""/>
-        <p:cNvGrpSpPr/>
-        <p:nvPr/>
-      </p:nvGrpSpPr>
-      <p:grpSpPr>
-        <a:xfrm>
-          <a:off x="0" y="0"/>
-          <a:ext cx="0" cy="0"/>
-          <a:chOff x="0" y="0"/>
-          <a:chExt cx="0" cy="0"/>
-        </a:xfrm>
-      </p:grpSpPr>
-      <p:sp>
-        <p:nvSpPr>
-          <p:cNvPr id="2" name="Slide Image Placeholder 1"/>
-          <p:cNvSpPr>
-            <a:spLocks noGrp="1" noRot="1" noChangeAspect="1"/>
-          </p:cNvSpPr>
-          <p:nvPr>
-            <p:ph type="sldImg"/>
-          </p:nvPr>
-        </p:nvSpPr>
-        <p:spPr/>
-      </p:sp>
-      <p:sp>
-        <p:nvSpPr>
-          <p:cNvPr id="3" name="Notes Placeholder 2"/>
-          <p:cNvSpPr>
-            <a:spLocks noGrp="1"/>
-          </p:cNvSpPr>
-          <p:nvPr>
-            <p:ph type="body" idx="1"/>
-          </p:nvPr>
-        </p:nvSpPr>
-        <p:spPr/>
-        <p:txBody>
-          <a:bodyPr/>
-          <a:lstStyle/>
-          <a:p>
-            <a:r>
-              <a:rPr lang="en-US" dirty="0"/>
-              <a:t/>
-            </a:r>
-            <a:endParaRPr lang="en-US" dirty="0"/>
-          </a:p>
-        </p:txBody>
-      </p:sp>
-      <p:sp>
-        <p:nvSpPr>
-          <p:cNvPr id="4" name="Slide Number Placeholder 3"/>
-          <p:cNvSpPr>
-            <a:spLocks noGrp="1"/>
-          </p:cNvSpPr>
-          <p:nvPr>
-            <p:ph type="sldNum" sz="quarter" idx="10"/>
-          </p:nvPr>
-        </p:nvSpPr>
-        <p:spPr/>
-        <p:txBody>
-          <a:bodyPr/>
-          <a:lstStyle/>
-          <a:p>
-            <a:fld id="{F7021451-1387-4CA6-816F-3879F97B5CBC}" type="slidenum">
-              <a:rPr lang="en-US"/>
-              <a:t>6</a:t>
-            </a:fld>
-            <a:endParaRPr lang="en-US"/>
-          </a:p>
-        </p:txBody>
-      </p:sp>
-    </p:spTree>
-    <p:extLst>
-      <p:ext uri="{BB962C8B-B14F-4D97-AF65-F5344CB8AC3E}">
-        <p14:creationId xmlns:p14="http://schemas.microsoft.com/office/powerpoint/2010/main" val="1024086991"/>
-      </p:ext>
-    </p:extLst>
-  </p:cSld>
-  <p:clrMapOvr>
-    <a:masterClrMapping/>
-  </p:clrMapOvr>
-</p:notes>
-</file>
-
-<file path=ppt/notesSlides/notesSlide7.xml><?xml version="1.0" encoding="utf-8"?>
-<p:notes xmlns:a="http://schemas.openxmlformats.org/drawingml/2006/main" xmlns:r="http://schemas.openxmlformats.org/officeDocument/2006/relationships" xmlns:p="http://schemas.openxmlformats.org/presentationml/2006/main">
-  <p:cSld>
-    <p:spTree>
-      <p:nvGrpSpPr>
-        <p:cNvPr id="1" name=""/>
-        <p:cNvGrpSpPr/>
-        <p:nvPr/>
-      </p:nvGrpSpPr>
-      <p:grpSpPr>
-        <a:xfrm>
-          <a:off x="0" y="0"/>
-          <a:ext cx="0" cy="0"/>
-          <a:chOff x="0" y="0"/>
-          <a:chExt cx="0" cy="0"/>
-        </a:xfrm>
-      </p:grpSpPr>
-      <p:sp>
-        <p:nvSpPr>
-          <p:cNvPr id="2" name="Slide Image Placeholder 1"/>
-          <p:cNvSpPr>
-            <a:spLocks noGrp="1" noRot="1" noChangeAspect="1"/>
-          </p:cNvSpPr>
-          <p:nvPr>
-            <p:ph type="sldImg"/>
-          </p:nvPr>
-        </p:nvSpPr>
-        <p:spPr/>
-      </p:sp>
-      <p:sp>
-        <p:nvSpPr>
-          <p:cNvPr id="3" name="Notes Placeholder 2"/>
-          <p:cNvSpPr>
-            <a:spLocks noGrp="1"/>
-          </p:cNvSpPr>
-          <p:nvPr>
-            <p:ph type="body" idx="1"/>
-          </p:nvPr>
-        </p:nvSpPr>
-        <p:spPr/>
-        <p:txBody>
-          <a:bodyPr/>
-          <a:lstStyle/>
-          <a:p>
-            <a:r>
-              <a:rPr lang="en-US" dirty="0"/>
-              <a:t/>
-            </a:r>
-            <a:endParaRPr lang="en-US" dirty="0"/>
-          </a:p>
-        </p:txBody>
-      </p:sp>
-      <p:sp>
-        <p:nvSpPr>
-          <p:cNvPr id="4" name="Slide Number Placeholder 3"/>
-          <p:cNvSpPr>
-            <a:spLocks noGrp="1"/>
-          </p:cNvSpPr>
-          <p:nvPr>
-            <p:ph type="sldNum" sz="quarter" idx="10"/>
-          </p:nvPr>
-        </p:nvSpPr>
-        <p:spPr/>
-        <p:txBody>
-          <a:bodyPr/>
-          <a:lstStyle/>
-          <a:p>
-            <a:fld id="{F7021451-1387-4CA6-816F-3879F97B5CBC}" type="slidenum">
-              <a:rPr lang="en-US"/>
-              <a:t>7</a:t>
-            </a:fld>
-            <a:endParaRPr lang="en-US"/>
-          </a:p>
-        </p:txBody>
-      </p:sp>
-    </p:spTree>
-    <p:extLst>
-      <p:ext uri="{BB962C8B-B14F-4D97-AF65-F5344CB8AC3E}">
-        <p14:creationId xmlns:p14="http://schemas.microsoft.com/office/powerpoint/2010/main" val="1024086991"/>
-      </p:ext>
-    </p:extLst>
-  </p:cSld>
-  <p:clrMapOvr>
-    <a:masterClrMapping/>
-  </p:clrMapOvr>
-</p:notes>
-</file>
-
-<file path=ppt/notesSlides/notesSlide8.xml><?xml version="1.0" encoding="utf-8"?>
-<p:notes xmlns:a="http://schemas.openxmlformats.org/drawingml/2006/main" xmlns:r="http://schemas.openxmlformats.org/officeDocument/2006/relationships" xmlns:p="http://schemas.openxmlformats.org/presentationml/2006/main">
-  <p:cSld>
-    <p:spTree>
-      <p:nvGrpSpPr>
-        <p:cNvPr id="1" name=""/>
-        <p:cNvGrpSpPr/>
-        <p:nvPr/>
-      </p:nvGrpSpPr>
-      <p:grpSpPr>
-        <a:xfrm>
-          <a:off x="0" y="0"/>
-          <a:ext cx="0" cy="0"/>
-          <a:chOff x="0" y="0"/>
-          <a:chExt cx="0" cy="0"/>
-        </a:xfrm>
-      </p:grpSpPr>
-      <p:sp>
-        <p:nvSpPr>
-          <p:cNvPr id="2" name="Slide Image Placeholder 1"/>
-          <p:cNvSpPr>
-            <a:spLocks noGrp="1" noRot="1" noChangeAspect="1"/>
-          </p:cNvSpPr>
-          <p:nvPr>
-            <p:ph type="sldImg"/>
-          </p:nvPr>
-        </p:nvSpPr>
-        <p:spPr/>
-      </p:sp>
-      <p:sp>
-        <p:nvSpPr>
-          <p:cNvPr id="3" name="Notes Placeholder 2"/>
-          <p:cNvSpPr>
-            <a:spLocks noGrp="1"/>
-          </p:cNvSpPr>
-          <p:nvPr>
-            <p:ph type="body" idx="1"/>
-          </p:nvPr>
-        </p:nvSpPr>
-        <p:spPr/>
-        <p:txBody>
-          <a:bodyPr/>
-          <a:lstStyle/>
-          <a:p>
-            <a:r>
-              <a:rPr lang="en-US" dirty="0"/>
-              <a:t/>
-            </a:r>
-            <a:endParaRPr lang="en-US" dirty="0"/>
-          </a:p>
-        </p:txBody>
-      </p:sp>
-      <p:sp>
-        <p:nvSpPr>
-          <p:cNvPr id="4" name="Slide Number Placeholder 3"/>
-          <p:cNvSpPr>
-            <a:spLocks noGrp="1"/>
-          </p:cNvSpPr>
-          <p:nvPr>
-            <p:ph type="sldNum" sz="quarter" idx="10"/>
-          </p:nvPr>
-        </p:nvSpPr>
-        <p:spPr/>
-        <p:txBody>
-          <a:bodyPr/>
-          <a:lstStyle/>
-          <a:p>
-            <a:fld id="{F7021451-1387-4CA6-816F-3879F97B5CBC}" type="slidenum">
-              <a:rPr lang="en-US"/>
-              <a:t>8</a:t>
-            </a:fld>
-            <a:endParaRPr lang="en-US"/>
-          </a:p>
-        </p:txBody>
-      </p:sp>
-    </p:spTree>
-    <p:extLst>
-      <p:ext uri="{BB962C8B-B14F-4D97-AF65-F5344CB8AC3E}">
-        <p14:creationId xmlns:p14="http://schemas.microsoft.com/office/powerpoint/2010/main" val="1024086991"/>
-      </p:ext>
-    </p:extLst>
-  </p:cSld>
-  <p:clrMapOvr>
-    <a:masterClrMapping/>
-  </p:clrMapOvr>
-</p:notes>
-</file>
-
 <file path=ppt/slideLayouts/slideLayout1.xml><?xml version="1.0" encoding="utf-8"?>
 <p:sldLayout xmlns:a="http://schemas.openxmlformats.org/drawingml/2006/main" xmlns:r="http://schemas.openxmlformats.org/officeDocument/2006/relationships" xmlns:p="http://schemas.openxmlformats.org/presentationml/2006/main" preserve="1">
   <p:cSld name="DEFAULT">
@@ -2598,7 +2238,7 @@
                   <a:schemeClr val="tx1"/>
                 </a:solidFill>
               </a:rPr>
-              <a:t>10년 뒤 쏟아질 배터리를 고치고 재활용할 기술자가 필요하다.</a:t>
+              <a:t>2030년 전후부터 보증이 끝나는 배터리를 고치고 재활용할 기술자가 필요하다.</a:t>
             </a:r>
             <a:endParaRPr lang="en-US" sz="2400" dirty="0"/>
           </a:p>
@@ -2960,705 +2600,6 @@
                   <a:schemeClr val="tx2"/>
                 </a:solidFill>
               </a:rPr>
-              <a:t>1장 설명 · 핵심 요약</a:t>
-            </a:r>
-            <a:endParaRPr lang="en-US" sz="2400" dirty="0"/>
-          </a:p>
-        </p:txBody>
-      </p:sp>
-      <p:sp>
-        <p:nvSpPr>
-          <p:cNvPr id="3" name="설명 배지 1"/>
-          <p:cNvSpPr/>
-          <p:nvPr/>
-        </p:nvSpPr>
-        <p:spPr>
-          <a:xfrm>
-            <a:off x="457200" y="384048"/>
-            <a:ext cx="420624" cy="329184"/>
-          </a:xfrm>
-          <a:prstGeom prst="roundRect">
-            <a:avLst>
-              <a:gd name="adj" fmla="val 22222"/>
-            </a:avLst>
-          </a:prstGeom>
-          <a:solidFill>
-            <a:schemeClr val="accent1"/>
-          </a:solidFill>
-          <a:ln w="12700">
-            <a:solidFill>
-              <a:schemeClr val="accent1"/>
-            </a:solidFill>
-            <a:prstDash val="solid"/>
-          </a:ln>
-        </p:spPr>
-      </p:sp>
-      <p:sp>
-        <p:nvSpPr>
-          <p:cNvPr id="4" name="설명 배지 글자 1"/>
-          <p:cNvSpPr txBox="1"/>
-          <p:nvPr/>
-        </p:nvSpPr>
-        <p:spPr>
-          <a:xfrm>
-            <a:off x="457200" y="384048"/>
-            <a:ext cx="420624" cy="329184"/>
-          </a:xfrm>
-          <a:prstGeom prst="rect">
-            <a:avLst/>
-          </a:prstGeom>
-          <a:noFill/>
-          <a:ln/>
-        </p:spPr>
-        <p:txBody>
-          <a:bodyPr wrap="square" lIns="0" tIns="0" rIns="0" bIns="0" rtlCol="0" anchor="ctr"/>
-          <a:lstStyle/>
-          <a:p>
-            <a:pPr algn="ctr" indent="0" marL="0">
-              <a:buNone/>
-            </a:pPr>
-            <a:r>
-              <a:rPr lang="en-US" sz="1000" b="1" dirty="0">
-                <a:solidFill>
-                  <a:schemeClr val="bg1"/>
-                </a:solidFill>
-              </a:rPr>
-              <a:t>설명</a:t>
-            </a:r>
-            <a:endParaRPr lang="en-US" sz="1000" dirty="0"/>
-          </a:p>
-        </p:txBody>
-      </p:sp>
-      <p:sp>
-        <p:nvSpPr>
-          <p:cNvPr id="5" name="설명 카드 1-1"/>
-          <p:cNvSpPr/>
-          <p:nvPr/>
-        </p:nvSpPr>
-        <p:spPr>
-          <a:xfrm>
-            <a:off x="457200" y="960120"/>
-            <a:ext cx="4023360" cy="1691640"/>
-          </a:xfrm>
-          <a:prstGeom prst="roundRect">
-            <a:avLst>
-              <a:gd name="adj" fmla="val 3243"/>
-            </a:avLst>
-          </a:prstGeom>
-          <a:solidFill>
-            <a:srgbClr val="FFFFFF"/>
-          </a:solidFill>
-          <a:ln w="9525">
-            <a:solidFill>
-              <a:srgbClr val="DCE5DF"/>
-            </a:solidFill>
-            <a:prstDash val="solid"/>
-          </a:ln>
-        </p:spPr>
-      </p:sp>
-      <p:sp>
-        <p:nvSpPr>
-          <p:cNvPr id="6" name="설명 제목 1-1"/>
-          <p:cNvSpPr txBox="1"/>
-          <p:nvPr/>
-        </p:nvSpPr>
-        <p:spPr>
-          <a:xfrm>
-            <a:off x="621792" y="1051560"/>
-            <a:ext cx="3657600" cy="274320"/>
-          </a:xfrm>
-          <a:prstGeom prst="rect">
-            <a:avLst/>
-          </a:prstGeom>
-          <a:noFill/>
-          <a:ln/>
-        </p:spPr>
-        <p:txBody>
-          <a:bodyPr wrap="square" lIns="0" tIns="0" rIns="0" bIns="0" rtlCol="0" anchor="ctr"/>
-          <a:lstStyle/>
-          <a:p>
-            <a:pPr indent="0" marL="0">
-              <a:buNone/>
-            </a:pPr>
-            <a:r>
-              <a:rPr lang="en-US" sz="1150" b="1" dirty="0">
-                <a:solidFill>
-                  <a:schemeClr val="tx2"/>
-                </a:solidFill>
-              </a:rPr>
-              <a:t>이 장이 보여 주는 것</a:t>
-            </a:r>
-            <a:endParaRPr lang="en-US" sz="1150" dirty="0"/>
-          </a:p>
-        </p:txBody>
-      </p:sp>
-      <p:sp>
-        <p:nvSpPr>
-          <p:cNvPr id="7" name="설명 내용 1-1"/>
-          <p:cNvSpPr txBox="1"/>
-          <p:nvPr/>
-        </p:nvSpPr>
-        <p:spPr>
-          <a:xfrm>
-            <a:off x="621792" y="1344168"/>
-            <a:ext cx="3703320" cy="1234440"/>
-          </a:xfrm>
-          <a:prstGeom prst="rect">
-            <a:avLst/>
-          </a:prstGeom>
-          <a:noFill/>
-          <a:ln/>
-        </p:spPr>
-        <p:txBody>
-          <a:bodyPr wrap="square" lIns="0" tIns="0" rIns="0" bIns="0" rtlCol="0" anchor="t">
-            <a:normAutofit/>
-          </a:bodyPr>
-          <a:lstStyle/>
-          <a:p>
-            <a:pPr marL="342900" indent="-342900">
-              <a:spcAft>
-                <a:spcPts val="300"/>
-              </a:spcAft>
-              <a:buSzPct val="100000"/>
-              <a:buChar char="•"/>
-            </a:pPr>
-            <a:r>
-              <a:rPr lang="en-US" sz="1050" dirty="0">
-                <a:solidFill>
-                  <a:schemeClr val="tx1"/>
-                </a:solidFill>
-              </a:rPr>
-              <a:t>통계로 받친 주장 한 문장 + 통계 활동에 조언을 얻은 책 한 권</a:t>
-            </a:r>
-            <a:endParaRPr lang="en-US" sz="1050" dirty="0"/>
-          </a:p>
-          <a:p>
-            <a:pPr marL="342900" indent="-342900">
-              <a:spcAft>
-                <a:spcPts val="300"/>
-              </a:spcAft>
-              <a:buSzPct val="100000"/>
-              <a:buChar char="•"/>
-            </a:pPr>
-            <a:r>
-              <a:rPr lang="en-US" sz="1050" dirty="0">
-                <a:solidFill>
-                  <a:schemeClr val="tx1"/>
-                </a:solidFill>
-              </a:rPr>
-              <a:t>'급증'도 '주춤'도 아닌, 숫자로 확인한 '꾸준한 증가'</a:t>
-            </a:r>
-            <a:endParaRPr lang="en-US" sz="1050" dirty="0"/>
-          </a:p>
-          <a:p>
-            <a:pPr marL="342900" indent="-342900">
-              <a:spcAft>
-                <a:spcPts val="300"/>
-              </a:spcAft>
-              <a:buSzPct val="100000"/>
-              <a:buChar char="•"/>
-            </a:pPr>
-            <a:r>
-              <a:rPr lang="en-US" sz="1050" dirty="0">
-                <a:solidFill>
-                  <a:schemeClr val="tx1"/>
-                </a:solidFill>
-              </a:rPr>
-              <a:t>진로(배터리 엔지니어)와 자료(등록 통계) 연결</a:t>
-            </a:r>
-            <a:endParaRPr lang="en-US" sz="1050" dirty="0"/>
-          </a:p>
-        </p:txBody>
-      </p:sp>
-      <p:sp>
-        <p:nvSpPr>
-          <p:cNvPr id="8" name="설명 카드 1-2"/>
-          <p:cNvSpPr/>
-          <p:nvPr/>
-        </p:nvSpPr>
-        <p:spPr>
-          <a:xfrm>
-            <a:off x="4663440" y="960120"/>
-            <a:ext cx="4023360" cy="1691640"/>
-          </a:xfrm>
-          <a:prstGeom prst="roundRect">
-            <a:avLst>
-              <a:gd name="adj" fmla="val 3243"/>
-            </a:avLst>
-          </a:prstGeom>
-          <a:solidFill>
-            <a:srgbClr val="FFFFFF"/>
-          </a:solidFill>
-          <a:ln w="9525">
-            <a:solidFill>
-              <a:srgbClr val="DCE5DF"/>
-            </a:solidFill>
-            <a:prstDash val="solid"/>
-          </a:ln>
-        </p:spPr>
-      </p:sp>
-      <p:sp>
-        <p:nvSpPr>
-          <p:cNvPr id="9" name="설명 제목 1-2"/>
-          <p:cNvSpPr txBox="1"/>
-          <p:nvPr/>
-        </p:nvSpPr>
-        <p:spPr>
-          <a:xfrm>
-            <a:off x="4828032" y="1051560"/>
-            <a:ext cx="3657600" cy="274320"/>
-          </a:xfrm>
-          <a:prstGeom prst="rect">
-            <a:avLst/>
-          </a:prstGeom>
-          <a:noFill/>
-          <a:ln/>
-        </p:spPr>
-        <p:txBody>
-          <a:bodyPr wrap="square" lIns="0" tIns="0" rIns="0" bIns="0" rtlCol="0" anchor="ctr"/>
-          <a:lstStyle/>
-          <a:p>
-            <a:pPr indent="0" marL="0">
-              <a:buNone/>
-            </a:pPr>
-            <a:r>
-              <a:rPr lang="en-US" sz="1150" b="1" dirty="0">
-                <a:solidFill>
-                  <a:schemeClr val="tx2"/>
-                </a:solidFill>
-              </a:rPr>
-              <a:t>책에서 얻은 조언 (통계 활동용)</a:t>
-            </a:r>
-            <a:endParaRPr lang="en-US" sz="1150" dirty="0"/>
-          </a:p>
-        </p:txBody>
-      </p:sp>
-      <p:sp>
-        <p:nvSpPr>
-          <p:cNvPr id="10" name="설명 내용 1-2"/>
-          <p:cNvSpPr txBox="1"/>
-          <p:nvPr/>
-        </p:nvSpPr>
-        <p:spPr>
-          <a:xfrm>
-            <a:off x="4828032" y="1344168"/>
-            <a:ext cx="3703320" cy="1234440"/>
-          </a:xfrm>
-          <a:prstGeom prst="rect">
-            <a:avLst/>
-          </a:prstGeom>
-          <a:noFill/>
-          <a:ln/>
-        </p:spPr>
-        <p:txBody>
-          <a:bodyPr wrap="square" lIns="0" tIns="0" rIns="0" bIns="0" rtlCol="0" anchor="t">
-            <a:normAutofit/>
-          </a:bodyPr>
-          <a:lstStyle/>
-          <a:p>
-            <a:pPr marL="342900" indent="-342900">
-              <a:spcAft>
-                <a:spcPts val="300"/>
-              </a:spcAft>
-              <a:buSzPct val="100000"/>
-              <a:buChar char="•"/>
-            </a:pPr>
-            <a:r>
-              <a:rPr lang="en-US" sz="1050" dirty="0">
-                <a:solidFill>
-                  <a:schemeClr val="tx1"/>
-                </a:solidFill>
-              </a:rPr>
-              <a:t>조언: 초기의 높은 증가율을 미래로 늘려 잡지 말라 → 증가율 대신 그해 증가 대수를 계산(2장)</a:t>
-            </a:r>
-            <a:endParaRPr lang="en-US" sz="1050" dirty="0"/>
-          </a:p>
-          <a:p>
-            <a:pPr marL="342900" indent="-342900">
-              <a:spcAft>
-                <a:spcPts val="300"/>
-              </a:spcAft>
-              <a:buSzPct val="100000"/>
-              <a:buChar char="•"/>
-            </a:pPr>
-            <a:r>
-              <a:rPr lang="en-US" sz="1050" dirty="0">
-                <a:solidFill>
-                  <a:schemeClr val="tx1"/>
-                </a:solidFill>
-              </a:rPr>
-              <a:t>그래프 세로축을 0부터 그린 것도 같은 조언(3장)</a:t>
-            </a:r>
-            <a:endParaRPr lang="en-US" sz="1050" dirty="0"/>
-          </a:p>
-          <a:p>
-            <a:pPr marL="342900" indent="-342900">
-              <a:spcAft>
-                <a:spcPts val="300"/>
-              </a:spcAft>
-              <a:buSzPct val="100000"/>
-              <a:buChar char="•"/>
-            </a:pPr>
-            <a:r>
-              <a:rPr lang="en-US" sz="1050" dirty="0">
-                <a:solidFill>
-                  <a:schemeClr val="tx1"/>
-                </a:solidFill>
-              </a:rPr>
-              <a:t>주장은 책이 아니라 등록 통계에서 나왔다</a:t>
-            </a:r>
-            <a:endParaRPr lang="en-US" sz="1050" dirty="0"/>
-          </a:p>
-        </p:txBody>
-      </p:sp>
-      <p:sp>
-        <p:nvSpPr>
-          <p:cNvPr id="11" name="설명 카드 1-3"/>
-          <p:cNvSpPr/>
-          <p:nvPr/>
-        </p:nvSpPr>
-        <p:spPr>
-          <a:xfrm>
-            <a:off x="457200" y="2788920"/>
-            <a:ext cx="4023360" cy="1691640"/>
-          </a:xfrm>
-          <a:prstGeom prst="roundRect">
-            <a:avLst>
-              <a:gd name="adj" fmla="val 3243"/>
-            </a:avLst>
-          </a:prstGeom>
-          <a:solidFill>
-            <a:srgbClr val="FFFFFF"/>
-          </a:solidFill>
-          <a:ln w="9525">
-            <a:solidFill>
-              <a:srgbClr val="DCE5DF"/>
-            </a:solidFill>
-            <a:prstDash val="solid"/>
-          </a:ln>
-        </p:spPr>
-      </p:sp>
-      <p:sp>
-        <p:nvSpPr>
-          <p:cNvPr id="12" name="설명 제목 1-3"/>
-          <p:cNvSpPr txBox="1"/>
-          <p:nvPr/>
-        </p:nvSpPr>
-        <p:spPr>
-          <a:xfrm>
-            <a:off x="621792" y="2880360"/>
-            <a:ext cx="3657600" cy="274320"/>
-          </a:xfrm>
-          <a:prstGeom prst="rect">
-            <a:avLst/>
-          </a:prstGeom>
-          <a:noFill/>
-          <a:ln/>
-        </p:spPr>
-        <p:txBody>
-          <a:bodyPr wrap="square" lIns="0" tIns="0" rIns="0" bIns="0" rtlCol="0" anchor="ctr"/>
-          <a:lstStyle/>
-          <a:p>
-            <a:pPr indent="0" marL="0">
-              <a:buNone/>
-            </a:pPr>
-            <a:r>
-              <a:rPr lang="en-US" sz="1150" b="1" dirty="0">
-                <a:solidFill>
-                  <a:schemeClr val="tx2"/>
-                </a:solidFill>
-              </a:rPr>
-              <a:t>실제로 읽을 분량</a:t>
-            </a:r>
-            <a:endParaRPr lang="en-US" sz="1150" dirty="0"/>
-          </a:p>
-        </p:txBody>
-      </p:sp>
-      <p:sp>
-        <p:nvSpPr>
-          <p:cNvPr id="13" name="설명 내용 1-3"/>
-          <p:cNvSpPr txBox="1"/>
-          <p:nvPr/>
-        </p:nvSpPr>
-        <p:spPr>
-          <a:xfrm>
-            <a:off x="621792" y="3172968"/>
-            <a:ext cx="3703320" cy="1234440"/>
-          </a:xfrm>
-          <a:prstGeom prst="rect">
-            <a:avLst/>
-          </a:prstGeom>
-          <a:noFill/>
-          <a:ln/>
-        </p:spPr>
-        <p:txBody>
-          <a:bodyPr wrap="square" lIns="0" tIns="0" rIns="0" bIns="0" rtlCol="0" anchor="t">
-            <a:normAutofit/>
-          </a:bodyPr>
-          <a:lstStyle/>
-          <a:p>
-            <a:pPr marL="342900" indent="-342900">
-              <a:spcAft>
-                <a:spcPts val="300"/>
-              </a:spcAft>
-              <a:buSzPct val="100000"/>
-              <a:buChar char="•"/>
-            </a:pPr>
-            <a:r>
-              <a:rPr lang="en-US" sz="1050" dirty="0">
-                <a:solidFill>
-                  <a:schemeClr val="tx1"/>
-                </a:solidFill>
-              </a:rPr>
-              <a:t>에너지와 자동차를 다룬 장</a:t>
-            </a:r>
-            <a:endParaRPr lang="en-US" sz="1050" dirty="0"/>
-          </a:p>
-          <a:p>
-            <a:pPr marL="342900" indent="-342900">
-              <a:spcAft>
-                <a:spcPts val="300"/>
-              </a:spcAft>
-              <a:buSzPct val="100000"/>
-              <a:buChar char="•"/>
-            </a:pPr>
-            <a:r>
-              <a:rPr lang="en-US" sz="1050" dirty="0">
-                <a:solidFill>
-                  <a:schemeClr val="tx1"/>
-                </a:solidFill>
-              </a:rPr>
-              <a:t>통계·데이터를 다룬 다른 책도 가능</a:t>
-            </a:r>
-            <a:endParaRPr lang="en-US" sz="1050" dirty="0"/>
-          </a:p>
-        </p:txBody>
-      </p:sp>
-      <p:sp>
-        <p:nvSpPr>
-          <p:cNvPr id="14" name="설명 카드 1-4"/>
-          <p:cNvSpPr/>
-          <p:nvPr/>
-        </p:nvSpPr>
-        <p:spPr>
-          <a:xfrm>
-            <a:off x="4663440" y="2788920"/>
-            <a:ext cx="4023360" cy="1691640"/>
-          </a:xfrm>
-          <a:prstGeom prst="roundRect">
-            <a:avLst>
-              <a:gd name="adj" fmla="val 3243"/>
-            </a:avLst>
-          </a:prstGeom>
-          <a:solidFill>
-            <a:srgbClr val="FFFFFF"/>
-          </a:solidFill>
-          <a:ln w="9525">
-            <a:solidFill>
-              <a:srgbClr val="DCE5DF"/>
-            </a:solidFill>
-            <a:prstDash val="solid"/>
-          </a:ln>
-        </p:spPr>
-      </p:sp>
-      <p:sp>
-        <p:nvSpPr>
-          <p:cNvPr id="15" name="설명 제목 1-4"/>
-          <p:cNvSpPr txBox="1"/>
-          <p:nvPr/>
-        </p:nvSpPr>
-        <p:spPr>
-          <a:xfrm>
-            <a:off x="4828032" y="2880360"/>
-            <a:ext cx="3657600" cy="274320"/>
-          </a:xfrm>
-          <a:prstGeom prst="rect">
-            <a:avLst/>
-          </a:prstGeom>
-          <a:noFill/>
-          <a:ln/>
-        </p:spPr>
-        <p:txBody>
-          <a:bodyPr wrap="square" lIns="0" tIns="0" rIns="0" bIns="0" rtlCol="0" anchor="ctr"/>
-          <a:lstStyle/>
-          <a:p>
-            <a:pPr indent="0" marL="0">
-              <a:buNone/>
-            </a:pPr>
-            <a:r>
-              <a:rPr lang="en-US" sz="1150" b="1" dirty="0">
-                <a:solidFill>
-                  <a:schemeClr val="tx2"/>
-                </a:solidFill>
-              </a:rPr>
-              <a:t>채점 연결</a:t>
-            </a:r>
-            <a:endParaRPr lang="en-US" sz="1150" dirty="0"/>
-          </a:p>
-        </p:txBody>
-      </p:sp>
-      <p:sp>
-        <p:nvSpPr>
-          <p:cNvPr id="16" name="설명 내용 1-4"/>
-          <p:cNvSpPr txBox="1"/>
-          <p:nvPr/>
-        </p:nvSpPr>
-        <p:spPr>
-          <a:xfrm>
-            <a:off x="4828032" y="3172968"/>
-            <a:ext cx="3703320" cy="1234440"/>
-          </a:xfrm>
-          <a:prstGeom prst="rect">
-            <a:avLst/>
-          </a:prstGeom>
-          <a:noFill/>
-          <a:ln/>
-        </p:spPr>
-        <p:txBody>
-          <a:bodyPr wrap="square" lIns="0" tIns="0" rIns="0" bIns="0" rtlCol="0" anchor="t">
-            <a:normAutofit/>
-          </a:bodyPr>
-          <a:lstStyle/>
-          <a:p>
-            <a:pPr marL="342900" indent="-342900">
-              <a:spcAft>
-                <a:spcPts val="300"/>
-              </a:spcAft>
-              <a:buSzPct val="100000"/>
-              <a:buChar char="•"/>
-            </a:pPr>
-            <a:r>
-              <a:rPr lang="en-US" sz="1050" dirty="0">
-                <a:solidFill>
-                  <a:schemeClr val="tx1"/>
-                </a:solidFill>
-              </a:rPr>
-              <a:t>1번 도서 20점: 도서명·저자 + 통계 활동에 얻은 조언</a:t>
-            </a:r>
-            <a:endParaRPr lang="en-US" sz="1050" dirty="0"/>
-          </a:p>
-          <a:p>
-            <a:pPr marL="342900" indent="-342900">
-              <a:spcAft>
-                <a:spcPts val="300"/>
-              </a:spcAft>
-              <a:buSzPct val="100000"/>
-              <a:buChar char="•"/>
-            </a:pPr>
-            <a:r>
-              <a:rPr lang="en-US" sz="1050" dirty="0">
-                <a:solidFill>
-                  <a:schemeClr val="tx1"/>
-                </a:solidFill>
-              </a:rPr>
-              <a:t>책의 조언이 2장·3장의 계산 방식에 쓰였으면 충분하다</a:t>
-            </a:r>
-            <a:endParaRPr lang="en-US" sz="1050" dirty="0"/>
-          </a:p>
-        </p:txBody>
-      </p:sp>
-      <p:sp>
-        <p:nvSpPr>
-          <p:cNvPr id="25" name="Slide Number Placeholder 0"/>
-          <p:cNvSpPr>
-            <a:spLocks noGrp="1"/>
-          </p:cNvSpPr>
-          <p:nvPr>
-            <p:ph type="sldNum" sz="quarter" idx="4294967295"/>
-          </p:nvPr>
-        </p:nvSpPr>
-        <p:spPr>
-          <a:xfrm>
-            <a:off x="8229600" y="4754880"/>
-            <a:ext cx="457200" cy="228600"/>
-          </a:xfrm>
-          <a:prstGeom prst="rect">
-            <a:avLst/>
-          </a:prstGeom>
-          <a:extLst>
-            <a:ext uri="{C572A759-6A51-4108-AA02-DFA0A04FC94B}">
-              <ma14:wrappingTextBoxFlag xmlns:ma14="http://schemas.microsoft.com/office/mac/drawingml/2011/main" val="0"/>
-            </a:ext>
-          </a:extLst>
-        </p:spPr>
-        <p:txBody>
-          <a:bodyPr/>
-          <a:lstStyle>
-            <a:lvl1pPr>
-              <a:defRPr sz="900">
-                <a:solidFill>
-                  <a:srgbClr val="6B6759"/>
-                </a:solidFill>
-              </a:defRPr>
-            </a:lvl1pPr>
-          </a:lstStyle>
-          <a:p>
-            <a:pPr algn="r"/>
-            <a:fld id="{F7021451-1387-4CA6-816F-3879F97B5CBC}" type="slidenum">
-              <a:rPr b="0" lang="en-US"/>
-              <a:t>2</a:t>
-            </a:fld>
-            <a:endParaRPr lang="en-US"/>
-          </a:p>
-        </p:txBody>
-      </p:sp>
-    </p:spTree>
-  </p:cSld>
-  <p:clrMapOvr>
-    <a:masterClrMapping/>
-  </p:clrMapOvr>
-</p:sld>
-</file>
-
-<file path=ppt/slides/slide3.xml><?xml version="1.0" encoding="utf-8"?>
-<p:sld xmlns:a="http://schemas.openxmlformats.org/drawingml/2006/main" xmlns:r="http://schemas.openxmlformats.org/officeDocument/2006/relationships" xmlns:p="http://schemas.openxmlformats.org/presentationml/2006/main">
-  <p:cSld name="Slide 3">
-    <p:spTree>
-      <p:nvGrpSpPr>
-        <p:cNvPr id="1" name=""/>
-        <p:cNvGrpSpPr/>
-        <p:nvPr/>
-      </p:nvGrpSpPr>
-      <p:grpSpPr>
-        <a:xfrm>
-          <a:off x="0" y="0"/>
-          <a:ext cx="0" cy="0"/>
-          <a:chOff x="0" y="0"/>
-          <a:chExt cx="0" cy="0"/>
-        </a:xfrm>
-      </p:grpSpPr>
-      <p:sp>
-        <p:nvSpPr>
-          <p:cNvPr id="2" name="Text 0"/>
-          <p:cNvSpPr/>
-          <p:nvPr>
-            <p:ph idx="100" type="title" hasCustomPrompt="1"/>
-          </p:nvPr>
-        </p:nvSpPr>
-        <p:spPr>
-          <a:xfrm>
-            <a:off x="960120" y="274320"/>
-            <a:ext cx="7726680" cy="548640"/>
-          </a:xfrm>
-          <a:prstGeom prst="rect">
-            <a:avLst/>
-          </a:prstGeom>
-          <a:noFill/>
-          <a:ln/>
-        </p:spPr>
-        <p:txBody>
-          <a:bodyPr wrap="square" lIns="0" tIns="0" rIns="0" bIns="0" rtlCol="0" anchor="ctr"/>
-          <a:lstStyle/>
-          <a:p>
-            <a:pPr algn="l" indent="0" marL="0">
-              <a:buNone/>
-            </a:pPr>
-            <a:r>
-              <a:rPr lang="en-US" sz="2400" b="1" dirty="0">
-                <a:solidFill>
-                  <a:schemeClr val="tx2"/>
-                </a:solidFill>
-              </a:rPr>
               <a:t>자료 출처와 내가 만든 표</a:t>
             </a:r>
             <a:endParaRPr lang="en-US" sz="2400" dirty="0"/>
@@ -3866,7 +2807,7 @@
       </p:sp>
       <p:graphicFrame>
         <p:nvGraphicFramePr>
-          <p:cNvPr id="4" name="원자료 표"/>
+          <p:cNvPr id="3" name="원자료 표"/>
           <p:cNvGraphicFramePr>
             <a:graphicFrameLocks noGrp="1"/>
           </p:cNvGraphicFramePr>
@@ -6888,7 +5829,7 @@
       </p:sp>
       <p:graphicFrame>
         <p:nvGraphicFramePr>
-          <p:cNvPr id="7" name="내가 만든 표"/>
+          <p:cNvPr id="5" name="내가 만든 표"/>
           <p:cNvGraphicFramePr>
             <a:graphicFrameLocks noGrp="1"/>
           </p:cNvGraphicFramePr>
@@ -8233,7 +7174,7 @@
             <a:pPr algn="r"/>
             <a:fld id="{F7021451-1387-4CA6-816F-3879F97B5CBC}" type="slidenum">
               <a:rPr b="0" lang="en-US"/>
-              <a:t>3</a:t>
+              <a:t>2</a:t>
             </a:fld>
             <a:endParaRPr lang="en-US"/>
           </a:p>
@@ -8247,726 +7188,9 @@
 </p:sld>
 </file>
 
-<file path=ppt/slides/slide4.xml><?xml version="1.0" encoding="utf-8"?>
+<file path=ppt/slides/slide3.xml><?xml version="1.0" encoding="utf-8"?>
 <p:sld xmlns:a="http://schemas.openxmlformats.org/drawingml/2006/main" xmlns:r="http://schemas.openxmlformats.org/officeDocument/2006/relationships" xmlns:p="http://schemas.openxmlformats.org/presentationml/2006/main">
-  <p:cSld name="Slide 4">
-    <p:spTree>
-      <p:nvGrpSpPr>
-        <p:cNvPr id="1" name=""/>
-        <p:cNvGrpSpPr/>
-        <p:nvPr/>
-      </p:nvGrpSpPr>
-      <p:grpSpPr>
-        <a:xfrm>
-          <a:off x="0" y="0"/>
-          <a:ext cx="0" cy="0"/>
-          <a:chOff x="0" y="0"/>
-          <a:chExt cx="0" cy="0"/>
-        </a:xfrm>
-      </p:grpSpPr>
-      <p:sp>
-        <p:nvSpPr>
-          <p:cNvPr id="2" name="Text 0"/>
-          <p:cNvSpPr/>
-          <p:nvPr>
-            <p:ph idx="100" type="title" hasCustomPrompt="1"/>
-          </p:nvPr>
-        </p:nvSpPr>
-        <p:spPr>
-          <a:xfrm>
-            <a:off x="960120" y="274320"/>
-            <a:ext cx="7726680" cy="548640"/>
-          </a:xfrm>
-          <a:prstGeom prst="rect">
-            <a:avLst/>
-          </a:prstGeom>
-          <a:noFill/>
-          <a:ln/>
-        </p:spPr>
-        <p:txBody>
-          <a:bodyPr wrap="square" lIns="0" tIns="0" rIns="0" bIns="0" rtlCol="0" anchor="ctr"/>
-          <a:lstStyle/>
-          <a:p>
-            <a:pPr algn="l" indent="0" marL="0">
-              <a:buNone/>
-            </a:pPr>
-            <a:r>
-              <a:rPr lang="en-US" sz="2400" b="1" dirty="0">
-                <a:solidFill>
-                  <a:schemeClr val="tx2"/>
-                </a:solidFill>
-              </a:rPr>
-              <a:t>2장 설명 · 핵심 요약</a:t>
-            </a:r>
-            <a:endParaRPr lang="en-US" sz="2400" dirty="0"/>
-          </a:p>
-        </p:txBody>
-      </p:sp>
-      <p:sp>
-        <p:nvSpPr>
-          <p:cNvPr id="3" name="설명 배지 2"/>
-          <p:cNvSpPr/>
-          <p:nvPr/>
-        </p:nvSpPr>
-        <p:spPr>
-          <a:xfrm>
-            <a:off x="457200" y="384048"/>
-            <a:ext cx="420624" cy="329184"/>
-          </a:xfrm>
-          <a:prstGeom prst="roundRect">
-            <a:avLst>
-              <a:gd name="adj" fmla="val 22222"/>
-            </a:avLst>
-          </a:prstGeom>
-          <a:solidFill>
-            <a:schemeClr val="accent1"/>
-          </a:solidFill>
-          <a:ln w="12700">
-            <a:solidFill>
-              <a:schemeClr val="accent1"/>
-            </a:solidFill>
-            <a:prstDash val="solid"/>
-          </a:ln>
-        </p:spPr>
-      </p:sp>
-      <p:sp>
-        <p:nvSpPr>
-          <p:cNvPr id="4" name="설명 배지 글자 2"/>
-          <p:cNvSpPr txBox="1"/>
-          <p:nvPr/>
-        </p:nvSpPr>
-        <p:spPr>
-          <a:xfrm>
-            <a:off x="457200" y="384048"/>
-            <a:ext cx="420624" cy="329184"/>
-          </a:xfrm>
-          <a:prstGeom prst="rect">
-            <a:avLst/>
-          </a:prstGeom>
-          <a:noFill/>
-          <a:ln/>
-        </p:spPr>
-        <p:txBody>
-          <a:bodyPr wrap="square" lIns="0" tIns="0" rIns="0" bIns="0" rtlCol="0" anchor="ctr"/>
-          <a:lstStyle/>
-          <a:p>
-            <a:pPr algn="ctr" indent="0" marL="0">
-              <a:buNone/>
-            </a:pPr>
-            <a:r>
-              <a:rPr lang="en-US" sz="1000" b="1" dirty="0">
-                <a:solidFill>
-                  <a:schemeClr val="bg1"/>
-                </a:solidFill>
-              </a:rPr>
-              <a:t>설명</a:t>
-            </a:r>
-            <a:endParaRPr lang="en-US" sz="1000" dirty="0"/>
-          </a:p>
-        </p:txBody>
-      </p:sp>
-      <p:sp>
-        <p:nvSpPr>
-          <p:cNvPr id="5" name="설명 카드 2-1"/>
-          <p:cNvSpPr/>
-          <p:nvPr/>
-        </p:nvSpPr>
-        <p:spPr>
-          <a:xfrm>
-            <a:off x="457200" y="960120"/>
-            <a:ext cx="4023360" cy="1691640"/>
-          </a:xfrm>
-          <a:prstGeom prst="roundRect">
-            <a:avLst>
-              <a:gd name="adj" fmla="val 3243"/>
-            </a:avLst>
-          </a:prstGeom>
-          <a:solidFill>
-            <a:srgbClr val="FFFFFF"/>
-          </a:solidFill>
-          <a:ln w="9525">
-            <a:solidFill>
-              <a:srgbClr val="DCE5DF"/>
-            </a:solidFill>
-            <a:prstDash val="solid"/>
-          </a:ln>
-        </p:spPr>
-      </p:sp>
-      <p:sp>
-        <p:nvSpPr>
-          <p:cNvPr id="6" name="설명 제목 2-1"/>
-          <p:cNvSpPr txBox="1"/>
-          <p:nvPr/>
-        </p:nvSpPr>
-        <p:spPr>
-          <a:xfrm>
-            <a:off x="621792" y="1051560"/>
-            <a:ext cx="3657600" cy="274320"/>
-          </a:xfrm>
-          <a:prstGeom prst="rect">
-            <a:avLst/>
-          </a:prstGeom>
-          <a:noFill/>
-          <a:ln/>
-        </p:spPr>
-        <p:txBody>
-          <a:bodyPr wrap="square" lIns="0" tIns="0" rIns="0" bIns="0" rtlCol="0" anchor="ctr"/>
-          <a:lstStyle/>
-          <a:p>
-            <a:pPr indent="0" marL="0">
-              <a:buNone/>
-            </a:pPr>
-            <a:r>
-              <a:rPr lang="en-US" sz="1150" b="1" dirty="0">
-                <a:solidFill>
-                  <a:schemeClr val="tx2"/>
-                </a:solidFill>
-              </a:rPr>
-              <a:t>실재하는 자료다</a:t>
-            </a:r>
-            <a:endParaRPr lang="en-US" sz="1150" dirty="0"/>
-          </a:p>
-        </p:txBody>
-      </p:sp>
-      <p:sp>
-        <p:nvSpPr>
-          <p:cNvPr id="7" name="설명 내용 2-1"/>
-          <p:cNvSpPr txBox="1"/>
-          <p:nvPr/>
-        </p:nvSpPr>
-        <p:spPr>
-          <a:xfrm>
-            <a:off x="621792" y="1344168"/>
-            <a:ext cx="3703320" cy="1234440"/>
-          </a:xfrm>
-          <a:prstGeom prst="rect">
-            <a:avLst/>
-          </a:prstGeom>
-          <a:noFill/>
-          <a:ln/>
-        </p:spPr>
-        <p:txBody>
-          <a:bodyPr wrap="square" lIns="0" tIns="0" rIns="0" bIns="0" rtlCol="0" anchor="t">
-            <a:normAutofit/>
-          </a:bodyPr>
-          <a:lstStyle/>
-          <a:p>
-            <a:pPr marL="342900" indent="-342900">
-              <a:spcAft>
-                <a:spcPts val="300"/>
-              </a:spcAft>
-              <a:buSzPct val="100000"/>
-              <a:buChar char="•"/>
-            </a:pPr>
-            <a:r>
-              <a:rPr lang="en-US" sz="1050" dirty="0">
-                <a:solidFill>
-                  <a:schemeClr val="tx1"/>
-                </a:solidFill>
-              </a:rPr>
-              <a:t>국토교통부가 매월 발표하는 자동차 등록 통계(국가승인통계)</a:t>
-            </a:r>
-            <a:endParaRPr lang="en-US" sz="1050" dirty="0"/>
-          </a:p>
-          <a:p>
-            <a:pPr marL="342900" indent="-342900">
-              <a:spcAft>
-                <a:spcPts val="300"/>
-              </a:spcAft>
-              <a:buSzPct val="100000"/>
-              <a:buChar char="•"/>
-            </a:pPr>
-            <a:r>
-              <a:rPr lang="en-US" sz="1050" dirty="0">
-                <a:solidFill>
-                  <a:schemeClr val="tx1"/>
-                </a:solidFill>
-              </a:rPr>
-              <a:t>연료별(휘발유·경유·LPG·하이브리드·전기·수소) 대수가 있다</a:t>
-            </a:r>
-            <a:endParaRPr lang="en-US" sz="1050" dirty="0"/>
-          </a:p>
-        </p:txBody>
-      </p:sp>
-      <p:sp>
-        <p:nvSpPr>
-          <p:cNvPr id="8" name="설명 카드 2-2"/>
-          <p:cNvSpPr/>
-          <p:nvPr/>
-        </p:nvSpPr>
-        <p:spPr>
-          <a:xfrm>
-            <a:off x="4663440" y="960120"/>
-            <a:ext cx="4023360" cy="1691640"/>
-          </a:xfrm>
-          <a:prstGeom prst="roundRect">
-            <a:avLst>
-              <a:gd name="adj" fmla="val 3243"/>
-            </a:avLst>
-          </a:prstGeom>
-          <a:solidFill>
-            <a:srgbClr val="FFFFFF"/>
-          </a:solidFill>
-          <a:ln w="9525">
-            <a:solidFill>
-              <a:srgbClr val="DCE5DF"/>
-            </a:solidFill>
-            <a:prstDash val="solid"/>
-          </a:ln>
-        </p:spPr>
-      </p:sp>
-      <p:sp>
-        <p:nvSpPr>
-          <p:cNvPr id="9" name="설명 제목 2-2"/>
-          <p:cNvSpPr txBox="1"/>
-          <p:nvPr/>
-        </p:nvSpPr>
-        <p:spPr>
-          <a:xfrm>
-            <a:off x="4828032" y="1051560"/>
-            <a:ext cx="3657600" cy="274320"/>
-          </a:xfrm>
-          <a:prstGeom prst="rect">
-            <a:avLst/>
-          </a:prstGeom>
-          <a:noFill/>
-          <a:ln/>
-        </p:spPr>
-        <p:txBody>
-          <a:bodyPr wrap="square" lIns="0" tIns="0" rIns="0" bIns="0" rtlCol="0" anchor="ctr"/>
-          <a:lstStyle/>
-          <a:p>
-            <a:pPr indent="0" marL="0">
-              <a:buNone/>
-            </a:pPr>
-            <a:r>
-              <a:rPr lang="en-US" sz="1150" b="1" dirty="0">
-                <a:solidFill>
-                  <a:schemeClr val="tx2"/>
-                </a:solidFill>
-              </a:rPr>
-              <a:t>얻는 길 (링크)</a:t>
-            </a:r>
-            <a:endParaRPr lang="en-US" sz="1150" dirty="0"/>
-          </a:p>
-        </p:txBody>
-      </p:sp>
-      <p:sp>
-        <p:nvSpPr>
-          <p:cNvPr id="10" name="설명 내용 2-2"/>
-          <p:cNvSpPr txBox="1"/>
-          <p:nvPr/>
-        </p:nvSpPr>
-        <p:spPr>
-          <a:xfrm>
-            <a:off x="4828032" y="1344168"/>
-            <a:ext cx="3703320" cy="1234440"/>
-          </a:xfrm>
-          <a:prstGeom prst="rect">
-            <a:avLst/>
-          </a:prstGeom>
-          <a:noFill/>
-          <a:ln/>
-        </p:spPr>
-        <p:txBody>
-          <a:bodyPr wrap="square" lIns="0" tIns="0" rIns="0" bIns="0" rtlCol="0" anchor="t">
-            <a:normAutofit/>
-          </a:bodyPr>
-          <a:lstStyle/>
-          <a:p>
-            <a:pPr marL="342900" indent="-342900">
-              <a:spcAft>
-                <a:spcPts val="300"/>
-              </a:spcAft>
-              <a:buSzPct val="100000"/>
-              <a:buChar char="•"/>
-            </a:pPr>
-            <a:r>
-              <a:rPr lang="en-US" sz="1050" dirty="0">
-                <a:solidFill>
-                  <a:schemeClr val="tx1"/>
-                </a:solidFill>
-              </a:rPr>
-              <a:t>index.go.kr → '자동차 등록현황' → 연료별 (e-나라지표, 연도별 표가 바로 나온다)</a:t>
-            </a:r>
-            <a:endParaRPr lang="en-US" sz="1050" dirty="0"/>
-          </a:p>
-          <a:p>
-            <a:pPr marL="342900" indent="-342900">
-              <a:spcAft>
-                <a:spcPts val="300"/>
-              </a:spcAft>
-              <a:buSzPct val="100000"/>
-              <a:buChar char="•"/>
-            </a:pPr>
-            <a:r>
-              <a:rPr lang="en-US" sz="1050" dirty="0">
-                <a:solidFill>
-                  <a:schemeClr val="tx1"/>
-                </a:solidFill>
-              </a:rPr>
-              <a:t>kosis.kr → 교통·물류 → 자동차등록현황보고</a:t>
-            </a:r>
-            <a:endParaRPr lang="en-US" sz="1050" dirty="0"/>
-          </a:p>
-          <a:p>
-            <a:pPr marL="342900" indent="-342900">
-              <a:spcAft>
-                <a:spcPts val="300"/>
-              </a:spcAft>
-              <a:buSzPct val="100000"/>
-              <a:buChar char="•"/>
-            </a:pPr>
-            <a:r>
-              <a:rPr lang="en-US" sz="1050" dirty="0">
-                <a:solidFill>
-                  <a:schemeClr val="tx1"/>
-                </a:solidFill>
-              </a:rPr>
-              <a:t>stat.molit.go.kr(국토교통 통계누리) → 자동차 등록 → 월별 표</a:t>
-            </a:r>
-            <a:endParaRPr lang="en-US" sz="1050" dirty="0"/>
-          </a:p>
-        </p:txBody>
-      </p:sp>
-      <p:sp>
-        <p:nvSpPr>
-          <p:cNvPr id="11" name="설명 카드 2-3"/>
-          <p:cNvSpPr/>
-          <p:nvPr/>
-        </p:nvSpPr>
-        <p:spPr>
-          <a:xfrm>
-            <a:off x="457200" y="2788920"/>
-            <a:ext cx="4023360" cy="1691640"/>
-          </a:xfrm>
-          <a:prstGeom prst="roundRect">
-            <a:avLst>
-              <a:gd name="adj" fmla="val 3243"/>
-            </a:avLst>
-          </a:prstGeom>
-          <a:solidFill>
-            <a:srgbClr val="FFFFFF"/>
-          </a:solidFill>
-          <a:ln w="9525">
-            <a:solidFill>
-              <a:srgbClr val="DCE5DF"/>
-            </a:solidFill>
-            <a:prstDash val="solid"/>
-          </a:ln>
-        </p:spPr>
-      </p:sp>
-      <p:sp>
-        <p:nvSpPr>
-          <p:cNvPr id="12" name="설명 제목 2-3"/>
-          <p:cNvSpPr txBox="1"/>
-          <p:nvPr/>
-        </p:nvSpPr>
-        <p:spPr>
-          <a:xfrm>
-            <a:off x="621792" y="2880360"/>
-            <a:ext cx="3657600" cy="274320"/>
-          </a:xfrm>
-          <a:prstGeom prst="rect">
-            <a:avLst/>
-          </a:prstGeom>
-          <a:noFill/>
-          <a:ln/>
-        </p:spPr>
-        <p:txBody>
-          <a:bodyPr wrap="square" lIns="0" tIns="0" rIns="0" bIns="0" rtlCol="0" anchor="ctr"/>
-          <a:lstStyle/>
-          <a:p>
-            <a:pPr indent="0" marL="0">
-              <a:buNone/>
-            </a:pPr>
-            <a:r>
-              <a:rPr lang="en-US" sz="1150" b="1" dirty="0">
-                <a:solidFill>
-                  <a:schemeClr val="tx2"/>
-                </a:solidFill>
-              </a:rPr>
-              <a:t>원자료 → 가공</a:t>
-            </a:r>
-            <a:endParaRPr lang="en-US" sz="1150" dirty="0"/>
-          </a:p>
-        </p:txBody>
-      </p:sp>
-      <p:sp>
-        <p:nvSpPr>
-          <p:cNvPr id="13" name="설명 내용 2-3"/>
-          <p:cNvSpPr txBox="1"/>
-          <p:nvPr/>
-        </p:nvSpPr>
-        <p:spPr>
-          <a:xfrm>
-            <a:off x="621792" y="3172968"/>
-            <a:ext cx="3703320" cy="1234440"/>
-          </a:xfrm>
-          <a:prstGeom prst="rect">
-            <a:avLst/>
-          </a:prstGeom>
-          <a:noFill/>
-          <a:ln/>
-        </p:spPr>
-        <p:txBody>
-          <a:bodyPr wrap="square" lIns="0" tIns="0" rIns="0" bIns="0" rtlCol="0" anchor="t">
-            <a:normAutofit/>
-          </a:bodyPr>
-          <a:lstStyle/>
-          <a:p>
-            <a:pPr marL="342900" indent="-342900">
-              <a:spcAft>
-                <a:spcPts val="300"/>
-              </a:spcAft>
-              <a:buSzPct val="100000"/>
-              <a:buChar char="•"/>
-            </a:pPr>
-            <a:r>
-              <a:rPr lang="en-US" sz="1050" dirty="0">
-                <a:solidFill>
-                  <a:schemeClr val="tx1"/>
-                </a:solidFill>
-              </a:rPr>
-              <a:t>전기 한 줄만 고르고, 천 대 → 만 대</a:t>
-            </a:r>
-            <a:endParaRPr lang="en-US" sz="1050" dirty="0"/>
-          </a:p>
-          <a:p>
-            <a:pPr marL="342900" indent="-342900">
-              <a:spcAft>
-                <a:spcPts val="300"/>
-              </a:spcAft>
-              <a:buSzPct val="100000"/>
-              <a:buChar char="•"/>
-            </a:pPr>
-            <a:r>
-              <a:rPr lang="en-US" sz="1050" dirty="0">
-                <a:solidFill>
-                  <a:schemeClr val="tx1"/>
-                </a:solidFill>
-              </a:rPr>
-              <a:t>'그해 증가'는 누적의 차이를 직접 계산해 넣은 열</a:t>
-            </a:r>
-            <a:endParaRPr lang="en-US" sz="1050" dirty="0"/>
-          </a:p>
-          <a:p>
-            <a:pPr marL="342900" indent="-342900">
-              <a:spcAft>
-                <a:spcPts val="300"/>
-              </a:spcAft>
-              <a:buSzPct val="100000"/>
-              <a:buChar char="•"/>
-            </a:pPr>
-            <a:r>
-              <a:rPr lang="en-US" sz="1050" dirty="0">
-                <a:solidFill>
-                  <a:schemeClr val="tx1"/>
-                </a:solidFill>
-              </a:rPr>
-              <a:t>증가율(71%→31%)은 분모가 커져 낮아 보일 뿐, 증가 대수는 14만~22만 대로 거의 일정(등차)</a:t>
-            </a:r>
-            <a:endParaRPr lang="en-US" sz="1050" dirty="0"/>
-          </a:p>
-        </p:txBody>
-      </p:sp>
-      <p:sp>
-        <p:nvSpPr>
-          <p:cNvPr id="14" name="설명 카드 2-4"/>
-          <p:cNvSpPr/>
-          <p:nvPr/>
-        </p:nvSpPr>
-        <p:spPr>
-          <a:xfrm>
-            <a:off x="4663440" y="2788920"/>
-            <a:ext cx="4023360" cy="1691640"/>
-          </a:xfrm>
-          <a:prstGeom prst="roundRect">
-            <a:avLst>
-              <a:gd name="adj" fmla="val 3243"/>
-            </a:avLst>
-          </a:prstGeom>
-          <a:solidFill>
-            <a:srgbClr val="FFFFFF"/>
-          </a:solidFill>
-          <a:ln w="9525">
-            <a:solidFill>
-              <a:srgbClr val="DCE5DF"/>
-            </a:solidFill>
-            <a:prstDash val="solid"/>
-          </a:ln>
-        </p:spPr>
-      </p:sp>
-      <p:sp>
-        <p:nvSpPr>
-          <p:cNvPr id="15" name="설명 제목 2-4"/>
-          <p:cNvSpPr txBox="1"/>
-          <p:nvPr/>
-        </p:nvSpPr>
-        <p:spPr>
-          <a:xfrm>
-            <a:off x="4828032" y="2880360"/>
-            <a:ext cx="3657600" cy="274320"/>
-          </a:xfrm>
-          <a:prstGeom prst="rect">
-            <a:avLst/>
-          </a:prstGeom>
-          <a:noFill/>
-          <a:ln/>
-        </p:spPr>
-        <p:txBody>
-          <a:bodyPr wrap="square" lIns="0" tIns="0" rIns="0" bIns="0" rtlCol="0" anchor="ctr"/>
-          <a:lstStyle/>
-          <a:p>
-            <a:pPr indent="0" marL="0">
-              <a:buNone/>
-            </a:pPr>
-            <a:r>
-              <a:rPr lang="en-US" sz="1150" b="1" dirty="0">
-                <a:solidFill>
-                  <a:schemeClr val="tx2"/>
-                </a:solidFill>
-              </a:rPr>
-              <a:t>채점 연결</a:t>
-            </a:r>
-            <a:endParaRPr lang="en-US" sz="1150" dirty="0"/>
-          </a:p>
-        </p:txBody>
-      </p:sp>
-      <p:sp>
-        <p:nvSpPr>
-          <p:cNvPr id="16" name="설명 내용 2-4"/>
-          <p:cNvSpPr txBox="1"/>
-          <p:nvPr/>
-        </p:nvSpPr>
-        <p:spPr>
-          <a:xfrm>
-            <a:off x="4828032" y="3172968"/>
-            <a:ext cx="3703320" cy="1234440"/>
-          </a:xfrm>
-          <a:prstGeom prst="rect">
-            <a:avLst/>
-          </a:prstGeom>
-          <a:noFill/>
-          <a:ln/>
-        </p:spPr>
-        <p:txBody>
-          <a:bodyPr wrap="square" lIns="0" tIns="0" rIns="0" bIns="0" rtlCol="0" anchor="t">
-            <a:normAutofit/>
-          </a:bodyPr>
-          <a:lstStyle/>
-          <a:p>
-            <a:pPr marL="342900" indent="-342900">
-              <a:spcAft>
-                <a:spcPts val="300"/>
-              </a:spcAft>
-              <a:buSzPct val="100000"/>
-              <a:buChar char="•"/>
-            </a:pPr>
-            <a:r>
-              <a:rPr lang="en-US" sz="1050" dirty="0">
-                <a:solidFill>
-                  <a:schemeClr val="tx1"/>
-                </a:solidFill>
-              </a:rPr>
-              <a:t>출처(기관·조사 이름·링크)를 표현했는가</a:t>
-            </a:r>
-            <a:endParaRPr lang="en-US" sz="1050" dirty="0"/>
-          </a:p>
-          <a:p>
-            <a:pPr marL="342900" indent="-342900">
-              <a:spcAft>
-                <a:spcPts val="300"/>
-              </a:spcAft>
-              <a:buSzPct val="100000"/>
-              <a:buChar char="•"/>
-            </a:pPr>
-            <a:r>
-              <a:rPr lang="en-US" sz="1050" dirty="0">
-                <a:solidFill>
-                  <a:schemeClr val="tx1"/>
-                </a:solidFill>
-              </a:rPr>
-              <a:t>모두 조사인지 밝혔는가: '등록 자료 전체', '보고통계'</a:t>
-            </a:r>
-            <a:endParaRPr lang="en-US" sz="1050" dirty="0"/>
-          </a:p>
-          <a:p>
-            <a:pPr marL="342900" indent="-342900">
-              <a:spcAft>
-                <a:spcPts val="300"/>
-              </a:spcAft>
-              <a:buSzPct val="100000"/>
-              <a:buChar char="•"/>
-            </a:pPr>
-            <a:r>
-              <a:rPr lang="en-US" sz="1050" dirty="0">
-                <a:solidFill>
-                  <a:schemeClr val="tx1"/>
-                </a:solidFill>
-              </a:rPr>
-              <a:t>가공 전·후를 보였고 직접 계산한 열도 넣었는가</a:t>
-            </a:r>
-            <a:endParaRPr lang="en-US" sz="1050" dirty="0"/>
-          </a:p>
-        </p:txBody>
-      </p:sp>
-      <p:sp>
-        <p:nvSpPr>
-          <p:cNvPr id="25" name="Slide Number Placeholder 0"/>
-          <p:cNvSpPr>
-            <a:spLocks noGrp="1"/>
-          </p:cNvSpPr>
-          <p:nvPr>
-            <p:ph type="sldNum" sz="quarter" idx="4294967295"/>
-          </p:nvPr>
-        </p:nvSpPr>
-        <p:spPr>
-          <a:xfrm>
-            <a:off x="8229600" y="4754880"/>
-            <a:ext cx="457200" cy="228600"/>
-          </a:xfrm>
-          <a:prstGeom prst="rect">
-            <a:avLst/>
-          </a:prstGeom>
-          <a:extLst>
-            <a:ext uri="{C572A759-6A51-4108-AA02-DFA0A04FC94B}">
-              <ma14:wrappingTextBoxFlag xmlns:ma14="http://schemas.microsoft.com/office/mac/drawingml/2011/main" val="0"/>
-            </a:ext>
-          </a:extLst>
-        </p:spPr>
-        <p:txBody>
-          <a:bodyPr/>
-          <a:lstStyle>
-            <a:lvl1pPr>
-              <a:defRPr sz="900">
-                <a:solidFill>
-                  <a:srgbClr val="6B6759"/>
-                </a:solidFill>
-              </a:defRPr>
-            </a:lvl1pPr>
-          </a:lstStyle>
-          <a:p>
-            <a:pPr algn="r"/>
-            <a:fld id="{F7021451-1387-4CA6-816F-3879F97B5CBC}" type="slidenum">
-              <a:rPr b="0" lang="en-US"/>
-              <a:t>4</a:t>
-            </a:fld>
-            <a:endParaRPr lang="en-US"/>
-          </a:p>
-        </p:txBody>
-      </p:sp>
-    </p:spTree>
-  </p:cSld>
-  <p:clrMapOvr>
-    <a:masterClrMapping/>
-  </p:clrMapOvr>
-</p:sld>
-</file>
-
-<file path=ppt/slides/slide5.xml><?xml version="1.0" encoding="utf-8"?>
-<p:sld xmlns:a="http://schemas.openxmlformats.org/drawingml/2006/main" xmlns:r="http://schemas.openxmlformats.org/officeDocument/2006/relationships" xmlns:p="http://schemas.openxmlformats.org/presentationml/2006/main">
-  <p:cSld name="Slide 5">
+  <p:cSld name="Slide 3">
     <p:spTree>
       <p:nvGrpSpPr>
         <p:cNvPr id="1" name=""/>
@@ -9454,7 +7678,7 @@
             <a:pPr algn="r"/>
             <a:fld id="{F7021451-1387-4CA6-816F-3879F97B5CBC}" type="slidenum">
               <a:rPr b="0" lang="en-US"/>
-              <a:t>5</a:t>
+              <a:t>3</a:t>
             </a:fld>
             <a:endParaRPr lang="en-US"/>
           </a:p>
@@ -9468,744 +7692,9 @@
 </p:sld>
 </file>
 
-<file path=ppt/slides/slide6.xml><?xml version="1.0" encoding="utf-8"?>
+<file path=ppt/slides/slide4.xml><?xml version="1.0" encoding="utf-8"?>
 <p:sld xmlns:a="http://schemas.openxmlformats.org/drawingml/2006/main" xmlns:r="http://schemas.openxmlformats.org/officeDocument/2006/relationships" xmlns:p="http://schemas.openxmlformats.org/presentationml/2006/main">
-  <p:cSld name="Slide 6">
-    <p:spTree>
-      <p:nvGrpSpPr>
-        <p:cNvPr id="1" name=""/>
-        <p:cNvGrpSpPr/>
-        <p:nvPr/>
-      </p:nvGrpSpPr>
-      <p:grpSpPr>
-        <a:xfrm>
-          <a:off x="0" y="0"/>
-          <a:ext cx="0" cy="0"/>
-          <a:chOff x="0" y="0"/>
-          <a:chExt cx="0" cy="0"/>
-        </a:xfrm>
-      </p:grpSpPr>
-      <p:sp>
-        <p:nvSpPr>
-          <p:cNvPr id="2" name="Text 0"/>
-          <p:cNvSpPr/>
-          <p:nvPr>
-            <p:ph idx="100" type="title" hasCustomPrompt="1"/>
-          </p:nvPr>
-        </p:nvSpPr>
-        <p:spPr>
-          <a:xfrm>
-            <a:off x="960120" y="274320"/>
-            <a:ext cx="7726680" cy="548640"/>
-          </a:xfrm>
-          <a:prstGeom prst="rect">
-            <a:avLst/>
-          </a:prstGeom>
-          <a:noFill/>
-          <a:ln/>
-        </p:spPr>
-        <p:txBody>
-          <a:bodyPr wrap="square" lIns="0" tIns="0" rIns="0" bIns="0" rtlCol="0" anchor="ctr"/>
-          <a:lstStyle/>
-          <a:p>
-            <a:pPr algn="l" indent="0" marL="0">
-              <a:buNone/>
-            </a:pPr>
-            <a:r>
-              <a:rPr lang="en-US" sz="2400" b="1" dirty="0">
-                <a:solidFill>
-                  <a:schemeClr val="tx2"/>
-                </a:solidFill>
-              </a:rPr>
-              <a:t>3장 설명 · 핵심 요약</a:t>
-            </a:r>
-            <a:endParaRPr lang="en-US" sz="2400" dirty="0"/>
-          </a:p>
-        </p:txBody>
-      </p:sp>
-      <p:sp>
-        <p:nvSpPr>
-          <p:cNvPr id="3" name="설명 배지 3"/>
-          <p:cNvSpPr/>
-          <p:nvPr/>
-        </p:nvSpPr>
-        <p:spPr>
-          <a:xfrm>
-            <a:off x="457200" y="384048"/>
-            <a:ext cx="420624" cy="329184"/>
-          </a:xfrm>
-          <a:prstGeom prst="roundRect">
-            <a:avLst>
-              <a:gd name="adj" fmla="val 22222"/>
-            </a:avLst>
-          </a:prstGeom>
-          <a:solidFill>
-            <a:schemeClr val="accent1"/>
-          </a:solidFill>
-          <a:ln w="12700">
-            <a:solidFill>
-              <a:schemeClr val="accent1"/>
-            </a:solidFill>
-            <a:prstDash val="solid"/>
-          </a:ln>
-        </p:spPr>
-      </p:sp>
-      <p:sp>
-        <p:nvSpPr>
-          <p:cNvPr id="4" name="설명 배지 글자 3"/>
-          <p:cNvSpPr txBox="1"/>
-          <p:nvPr/>
-        </p:nvSpPr>
-        <p:spPr>
-          <a:xfrm>
-            <a:off x="457200" y="384048"/>
-            <a:ext cx="420624" cy="329184"/>
-          </a:xfrm>
-          <a:prstGeom prst="rect">
-            <a:avLst/>
-          </a:prstGeom>
-          <a:noFill/>
-          <a:ln/>
-        </p:spPr>
-        <p:txBody>
-          <a:bodyPr wrap="square" lIns="0" tIns="0" rIns="0" bIns="0" rtlCol="0" anchor="ctr"/>
-          <a:lstStyle/>
-          <a:p>
-            <a:pPr algn="ctr" indent="0" marL="0">
-              <a:buNone/>
-            </a:pPr>
-            <a:r>
-              <a:rPr lang="en-US" sz="1000" b="1" dirty="0">
-                <a:solidFill>
-                  <a:schemeClr val="bg1"/>
-                </a:solidFill>
-              </a:rPr>
-              <a:t>설명</a:t>
-            </a:r>
-            <a:endParaRPr lang="en-US" sz="1000" dirty="0"/>
-          </a:p>
-        </p:txBody>
-      </p:sp>
-      <p:sp>
-        <p:nvSpPr>
-          <p:cNvPr id="5" name="설명 카드 3-1"/>
-          <p:cNvSpPr/>
-          <p:nvPr/>
-        </p:nvSpPr>
-        <p:spPr>
-          <a:xfrm>
-            <a:off x="457200" y="960120"/>
-            <a:ext cx="4023360" cy="1691640"/>
-          </a:xfrm>
-          <a:prstGeom prst="roundRect">
-            <a:avLst>
-              <a:gd name="adj" fmla="val 3243"/>
-            </a:avLst>
-          </a:prstGeom>
-          <a:solidFill>
-            <a:srgbClr val="FFFFFF"/>
-          </a:solidFill>
-          <a:ln w="9525">
-            <a:solidFill>
-              <a:srgbClr val="DCE5DF"/>
-            </a:solidFill>
-            <a:prstDash val="solid"/>
-          </a:ln>
-        </p:spPr>
-      </p:sp>
-      <p:sp>
-        <p:nvSpPr>
-          <p:cNvPr id="6" name="설명 제목 3-1"/>
-          <p:cNvSpPr txBox="1"/>
-          <p:nvPr/>
-        </p:nvSpPr>
-        <p:spPr>
-          <a:xfrm>
-            <a:off x="621792" y="1051560"/>
-            <a:ext cx="3657600" cy="274320"/>
-          </a:xfrm>
-          <a:prstGeom prst="rect">
-            <a:avLst/>
-          </a:prstGeom>
-          <a:noFill/>
-          <a:ln/>
-        </p:spPr>
-        <p:txBody>
-          <a:bodyPr wrap="square" lIns="0" tIns="0" rIns="0" bIns="0" rtlCol="0" anchor="ctr"/>
-          <a:lstStyle/>
-          <a:p>
-            <a:pPr indent="0" marL="0">
-              <a:buNone/>
-            </a:pPr>
-            <a:r>
-              <a:rPr lang="en-US" sz="1150" b="1" dirty="0">
-                <a:solidFill>
-                  <a:schemeClr val="tx2"/>
-                </a:solidFill>
-              </a:rPr>
-              <a:t>그래프 둘을 나란히</a:t>
-            </a:r>
-            <a:endParaRPr lang="en-US" sz="1150" dirty="0"/>
-          </a:p>
-        </p:txBody>
-      </p:sp>
-      <p:sp>
-        <p:nvSpPr>
-          <p:cNvPr id="7" name="설명 내용 3-1"/>
-          <p:cNvSpPr txBox="1"/>
-          <p:nvPr/>
-        </p:nvSpPr>
-        <p:spPr>
-          <a:xfrm>
-            <a:off x="621792" y="1344168"/>
-            <a:ext cx="3703320" cy="1234440"/>
-          </a:xfrm>
-          <a:prstGeom prst="rect">
-            <a:avLst/>
-          </a:prstGeom>
-          <a:noFill/>
-          <a:ln/>
-        </p:spPr>
-        <p:txBody>
-          <a:bodyPr wrap="square" lIns="0" tIns="0" rIns="0" bIns="0" rtlCol="0" anchor="t">
-            <a:normAutofit/>
-          </a:bodyPr>
-          <a:lstStyle/>
-          <a:p>
-            <a:pPr marL="342900" indent="-342900">
-              <a:spcAft>
-                <a:spcPts val="300"/>
-              </a:spcAft>
-              <a:buSzPct val="100000"/>
-              <a:buChar char="•"/>
-            </a:pPr>
-            <a:r>
-              <a:rPr lang="en-US" sz="1050" dirty="0">
-                <a:solidFill>
-                  <a:schemeClr val="tx1"/>
-                </a:solidFill>
-              </a:rPr>
-              <a:t>왼쪽 누적(얼마나 쌓였나), 오른쪽 그해 증가(해마다 얼마나)</a:t>
-            </a:r>
-            <a:endParaRPr lang="en-US" sz="1050" dirty="0"/>
-          </a:p>
-          <a:p>
-            <a:pPr marL="342900" indent="-342900">
-              <a:spcAft>
-                <a:spcPts val="300"/>
-              </a:spcAft>
-              <a:buSzPct val="100000"/>
-              <a:buChar char="•"/>
-            </a:pPr>
-            <a:r>
-              <a:rPr lang="en-US" sz="1050" dirty="0">
-                <a:solidFill>
-                  <a:schemeClr val="tx1"/>
-                </a:solidFill>
-              </a:rPr>
-              <a:t>같은 자료를 두 눈으로 본다. 두 축을 한 그래프에 겹치지 않는다</a:t>
-            </a:r>
-            <a:endParaRPr lang="en-US" sz="1050" dirty="0"/>
-          </a:p>
-          <a:p>
-            <a:pPr marL="342900" indent="-342900">
-              <a:spcAft>
-                <a:spcPts val="300"/>
-              </a:spcAft>
-              <a:buSzPct val="100000"/>
-              <a:buChar char="•"/>
-            </a:pPr>
-            <a:r>
-              <a:rPr lang="en-US" sz="1050" dirty="0">
-                <a:solidFill>
-                  <a:schemeClr val="tx1"/>
-                </a:solidFill>
-              </a:rPr>
-              <a:t>세로축은 둘 다 0부터</a:t>
-            </a:r>
-            <a:endParaRPr lang="en-US" sz="1050" dirty="0"/>
-          </a:p>
-        </p:txBody>
-      </p:sp>
-      <p:sp>
-        <p:nvSpPr>
-          <p:cNvPr id="8" name="설명 카드 3-2"/>
-          <p:cNvSpPr/>
-          <p:nvPr/>
-        </p:nvSpPr>
-        <p:spPr>
-          <a:xfrm>
-            <a:off x="4663440" y="960120"/>
-            <a:ext cx="4023360" cy="1691640"/>
-          </a:xfrm>
-          <a:prstGeom prst="roundRect">
-            <a:avLst>
-              <a:gd name="adj" fmla="val 3243"/>
-            </a:avLst>
-          </a:prstGeom>
-          <a:solidFill>
-            <a:srgbClr val="FFFFFF"/>
-          </a:solidFill>
-          <a:ln w="9525">
-            <a:solidFill>
-              <a:srgbClr val="DCE5DF"/>
-            </a:solidFill>
-            <a:prstDash val="solid"/>
-          </a:ln>
-        </p:spPr>
-      </p:sp>
-      <p:sp>
-        <p:nvSpPr>
-          <p:cNvPr id="9" name="설명 제목 3-2"/>
-          <p:cNvSpPr txBox="1"/>
-          <p:nvPr/>
-        </p:nvSpPr>
-        <p:spPr>
-          <a:xfrm>
-            <a:off x="4828032" y="1051560"/>
-            <a:ext cx="3657600" cy="274320"/>
-          </a:xfrm>
-          <a:prstGeom prst="rect">
-            <a:avLst/>
-          </a:prstGeom>
-          <a:noFill/>
-          <a:ln/>
-        </p:spPr>
-        <p:txBody>
-          <a:bodyPr wrap="square" lIns="0" tIns="0" rIns="0" bIns="0" rtlCol="0" anchor="ctr"/>
-          <a:lstStyle/>
-          <a:p>
-            <a:pPr indent="0" marL="0">
-              <a:buNone/>
-            </a:pPr>
-            <a:r>
-              <a:rPr lang="en-US" sz="1150" b="1" dirty="0">
-                <a:solidFill>
-                  <a:schemeClr val="tx2"/>
-                </a:solidFill>
-              </a:rPr>
-              <a:t>증가율 대신 증가 대수</a:t>
-            </a:r>
-            <a:endParaRPr lang="en-US" sz="1150" dirty="0"/>
-          </a:p>
-        </p:txBody>
-      </p:sp>
-      <p:sp>
-        <p:nvSpPr>
-          <p:cNvPr id="10" name="설명 내용 3-2"/>
-          <p:cNvSpPr txBox="1"/>
-          <p:nvPr/>
-        </p:nvSpPr>
-        <p:spPr>
-          <a:xfrm>
-            <a:off x="4828032" y="1344168"/>
-            <a:ext cx="3703320" cy="1234440"/>
-          </a:xfrm>
-          <a:prstGeom prst="rect">
-            <a:avLst/>
-          </a:prstGeom>
-          <a:noFill/>
-          <a:ln/>
-        </p:spPr>
-        <p:txBody>
-          <a:bodyPr wrap="square" lIns="0" tIns="0" rIns="0" bIns="0" rtlCol="0" anchor="t">
-            <a:normAutofit/>
-          </a:bodyPr>
-          <a:lstStyle/>
-          <a:p>
-            <a:pPr marL="342900" indent="-342900">
-              <a:spcAft>
-                <a:spcPts val="300"/>
-              </a:spcAft>
-              <a:buSzPct val="100000"/>
-              <a:buChar char="•"/>
-            </a:pPr>
-            <a:r>
-              <a:rPr lang="en-US" sz="1050" dirty="0">
-                <a:solidFill>
-                  <a:schemeClr val="tx1"/>
-                </a:solidFill>
-              </a:rPr>
-              <a:t>증가율은 분모(누적)가 커질수록 낮아진다(71%→26%→31%)</a:t>
-            </a:r>
-            <a:endParaRPr lang="en-US" sz="1050" dirty="0"/>
-          </a:p>
-          <a:p>
-            <a:pPr marL="342900" indent="-342900">
-              <a:spcAft>
-                <a:spcPts val="300"/>
-              </a:spcAft>
-              <a:buSzPct val="100000"/>
-              <a:buChar char="•"/>
-            </a:pPr>
-            <a:r>
-              <a:rPr lang="en-US" sz="1050" dirty="0">
-                <a:solidFill>
-                  <a:schemeClr val="tx1"/>
-                </a:solidFill>
-              </a:rPr>
-              <a:t>증가 대수는 2022년 이후 14만~22만 대로 거의 등차 → '둔화'가 아니라 '꾸준함'</a:t>
-            </a:r>
-            <a:endParaRPr lang="en-US" sz="1050" dirty="0"/>
-          </a:p>
-          <a:p>
-            <a:pPr marL="342900" indent="-342900">
-              <a:spcAft>
-                <a:spcPts val="300"/>
-              </a:spcAft>
-              <a:buSzPct val="100000"/>
-              <a:buChar char="•"/>
-            </a:pPr>
-            <a:r>
-              <a:rPr lang="en-US" sz="1050" dirty="0">
-                <a:solidFill>
-                  <a:schemeClr val="tx1"/>
-                </a:solidFill>
-              </a:rPr>
-              <a:t>스밀의 경고가 여기서 쓰였다</a:t>
-            </a:r>
-            <a:endParaRPr lang="en-US" sz="1050" dirty="0"/>
-          </a:p>
-        </p:txBody>
-      </p:sp>
-      <p:sp>
-        <p:nvSpPr>
-          <p:cNvPr id="11" name="설명 카드 3-3"/>
-          <p:cNvSpPr/>
-          <p:nvPr/>
-        </p:nvSpPr>
-        <p:spPr>
-          <a:xfrm>
-            <a:off x="457200" y="2788920"/>
-            <a:ext cx="4023360" cy="1691640"/>
-          </a:xfrm>
-          <a:prstGeom prst="roundRect">
-            <a:avLst>
-              <a:gd name="adj" fmla="val 3243"/>
-            </a:avLst>
-          </a:prstGeom>
-          <a:solidFill>
-            <a:srgbClr val="FFFFFF"/>
-          </a:solidFill>
-          <a:ln w="9525">
-            <a:solidFill>
-              <a:srgbClr val="DCE5DF"/>
-            </a:solidFill>
-            <a:prstDash val="solid"/>
-          </a:ln>
-        </p:spPr>
-      </p:sp>
-      <p:sp>
-        <p:nvSpPr>
-          <p:cNvPr id="12" name="설명 제목 3-3"/>
-          <p:cNvSpPr txBox="1"/>
-          <p:nvPr/>
-        </p:nvSpPr>
-        <p:spPr>
-          <a:xfrm>
-            <a:off x="621792" y="2880360"/>
-            <a:ext cx="3657600" cy="274320"/>
-          </a:xfrm>
-          <a:prstGeom prst="rect">
-            <a:avLst/>
-          </a:prstGeom>
-          <a:noFill/>
-          <a:ln/>
-        </p:spPr>
-        <p:txBody>
-          <a:bodyPr wrap="square" lIns="0" tIns="0" rIns="0" bIns="0" rtlCol="0" anchor="ctr"/>
-          <a:lstStyle/>
-          <a:p>
-            <a:pPr indent="0" marL="0">
-              <a:buNone/>
-            </a:pPr>
-            <a:r>
-              <a:rPr lang="en-US" sz="1150" b="1" dirty="0">
-                <a:solidFill>
-                  <a:schemeClr val="tx2"/>
-                </a:solidFill>
-              </a:rPr>
-              <a:t>의견과 근거를 잇는 법</a:t>
-            </a:r>
-            <a:endParaRPr lang="en-US" sz="1150" dirty="0"/>
-          </a:p>
-        </p:txBody>
-      </p:sp>
-      <p:sp>
-        <p:nvSpPr>
-          <p:cNvPr id="13" name="설명 내용 3-3"/>
-          <p:cNvSpPr txBox="1"/>
-          <p:nvPr/>
-        </p:nvSpPr>
-        <p:spPr>
-          <a:xfrm>
-            <a:off x="621792" y="3172968"/>
-            <a:ext cx="3703320" cy="1234440"/>
-          </a:xfrm>
-          <a:prstGeom prst="rect">
-            <a:avLst/>
-          </a:prstGeom>
-          <a:noFill/>
-          <a:ln/>
-        </p:spPr>
-        <p:txBody>
-          <a:bodyPr wrap="square" lIns="0" tIns="0" rIns="0" bIns="0" rtlCol="0" anchor="t">
-            <a:normAutofit/>
-          </a:bodyPr>
-          <a:lstStyle/>
-          <a:p>
-            <a:pPr marL="342900" indent="-342900">
-              <a:spcAft>
-                <a:spcPts val="300"/>
-              </a:spcAft>
-              <a:buSzPct val="100000"/>
-              <a:buChar char="•"/>
-            </a:pPr>
-            <a:r>
-              <a:rPr lang="en-US" sz="1050" dirty="0">
-                <a:solidFill>
-                  <a:schemeClr val="tx1"/>
-                </a:solidFill>
-              </a:rPr>
-              <a:t>②는 숫자를 보고 든 추측: '보증이 끝나는 배터리가 쏟아져 인력이 부족해진다'</a:t>
-            </a:r>
-            <a:endParaRPr lang="en-US" sz="1050" dirty="0"/>
-          </a:p>
-          <a:p>
-            <a:pPr marL="342900" indent="-342900">
-              <a:spcAft>
-                <a:spcPts val="300"/>
-              </a:spcAft>
-              <a:buSzPct val="100000"/>
-              <a:buChar char="•"/>
-            </a:pPr>
-            <a:r>
-              <a:rPr lang="en-US" sz="1050" dirty="0">
-                <a:solidFill>
-                  <a:schemeClr val="tx1"/>
-                </a:solidFill>
-              </a:rPr>
-              <a:t>③은 그 추측의 근거: 보증 기간(제조사 안내) + 그해 등록 대수(표 2)</a:t>
-            </a:r>
-            <a:endParaRPr lang="en-US" sz="1050" dirty="0"/>
-          </a:p>
-          <a:p>
-            <a:pPr marL="342900" indent="-342900">
-              <a:spcAft>
-                <a:spcPts val="300"/>
-              </a:spcAft>
-              <a:buSzPct val="100000"/>
-              <a:buChar char="•"/>
-            </a:pPr>
-            <a:r>
-              <a:rPr lang="en-US" sz="1050" dirty="0">
-                <a:solidFill>
-                  <a:schemeClr val="tx1"/>
-                </a:solidFill>
-              </a:rPr>
-              <a:t>보증 만료 수 = 8~10년 전 등록 대수라는 계산으로 둘을 잇는다</a:t>
-            </a:r>
-            <a:endParaRPr lang="en-US" sz="1050" dirty="0"/>
-          </a:p>
-        </p:txBody>
-      </p:sp>
-      <p:sp>
-        <p:nvSpPr>
-          <p:cNvPr id="14" name="설명 카드 3-4"/>
-          <p:cNvSpPr/>
-          <p:nvPr/>
-        </p:nvSpPr>
-        <p:spPr>
-          <a:xfrm>
-            <a:off x="4663440" y="2788920"/>
-            <a:ext cx="4023360" cy="1691640"/>
-          </a:xfrm>
-          <a:prstGeom prst="roundRect">
-            <a:avLst>
-              <a:gd name="adj" fmla="val 3243"/>
-            </a:avLst>
-          </a:prstGeom>
-          <a:solidFill>
-            <a:srgbClr val="FFFFFF"/>
-          </a:solidFill>
-          <a:ln w="9525">
-            <a:solidFill>
-              <a:srgbClr val="DCE5DF"/>
-            </a:solidFill>
-            <a:prstDash val="solid"/>
-          </a:ln>
-        </p:spPr>
-      </p:sp>
-      <p:sp>
-        <p:nvSpPr>
-          <p:cNvPr id="15" name="설명 제목 3-4"/>
-          <p:cNvSpPr txBox="1"/>
-          <p:nvPr/>
-        </p:nvSpPr>
-        <p:spPr>
-          <a:xfrm>
-            <a:off x="4828032" y="2880360"/>
-            <a:ext cx="3657600" cy="274320"/>
-          </a:xfrm>
-          <a:prstGeom prst="rect">
-            <a:avLst/>
-          </a:prstGeom>
-          <a:noFill/>
-          <a:ln/>
-        </p:spPr>
-        <p:txBody>
-          <a:bodyPr wrap="square" lIns="0" tIns="0" rIns="0" bIns="0" rtlCol="0" anchor="ctr"/>
-          <a:lstStyle/>
-          <a:p>
-            <a:pPr indent="0" marL="0">
-              <a:buNone/>
-            </a:pPr>
-            <a:r>
-              <a:rPr lang="en-US" sz="1150" b="1" dirty="0">
-                <a:solidFill>
-                  <a:schemeClr val="tx2"/>
-                </a:solidFill>
-              </a:rPr>
-              <a:t>채점 연결</a:t>
-            </a:r>
-            <a:endParaRPr lang="en-US" sz="1150" dirty="0"/>
-          </a:p>
-        </p:txBody>
-      </p:sp>
-      <p:sp>
-        <p:nvSpPr>
-          <p:cNvPr id="16" name="설명 내용 3-4"/>
-          <p:cNvSpPr txBox="1"/>
-          <p:nvPr/>
-        </p:nvSpPr>
-        <p:spPr>
-          <a:xfrm>
-            <a:off x="4828032" y="3172968"/>
-            <a:ext cx="3703320" cy="1234440"/>
-          </a:xfrm>
-          <a:prstGeom prst="rect">
-            <a:avLst/>
-          </a:prstGeom>
-          <a:noFill/>
-          <a:ln/>
-        </p:spPr>
-        <p:txBody>
-          <a:bodyPr wrap="square" lIns="0" tIns="0" rIns="0" bIns="0" rtlCol="0" anchor="t">
-            <a:normAutofit/>
-          </a:bodyPr>
-          <a:lstStyle/>
-          <a:p>
-            <a:pPr marL="342900" indent="-342900">
-              <a:spcAft>
-                <a:spcPts val="300"/>
-              </a:spcAft>
-              <a:buSzPct val="100000"/>
-              <a:buChar char="•"/>
-            </a:pPr>
-            <a:r>
-              <a:rPr lang="en-US" sz="1050" dirty="0">
-                <a:solidFill>
-                  <a:schemeClr val="tx1"/>
-                </a:solidFill>
-              </a:rPr>
-              <a:t>늘고 준 것을 숫자로 표현했는가(①)</a:t>
-            </a:r>
-            <a:endParaRPr lang="en-US" sz="1050" dirty="0"/>
-          </a:p>
-          <a:p>
-            <a:pPr marL="342900" indent="-342900">
-              <a:spcAft>
-                <a:spcPts val="300"/>
-              </a:spcAft>
-              <a:buSzPct val="100000"/>
-              <a:buChar char="•"/>
-            </a:pPr>
-            <a:r>
-              <a:rPr lang="en-US" sz="1050" dirty="0">
-                <a:solidFill>
-                  <a:schemeClr val="tx1"/>
-                </a:solidFill>
-              </a:rPr>
-              <a:t>가공된 자료로 의견 도출 또는 추측을 했는가(②)</a:t>
-            </a:r>
-            <a:endParaRPr lang="en-US" sz="1050" dirty="0"/>
-          </a:p>
-          <a:p>
-            <a:pPr marL="342900" indent="-342900">
-              <a:spcAft>
-                <a:spcPts val="300"/>
-              </a:spcAft>
-              <a:buSzPct val="100000"/>
-              <a:buChar char="•"/>
-            </a:pPr>
-            <a:r>
-              <a:rPr lang="en-US" sz="1050" dirty="0">
-                <a:solidFill>
-                  <a:schemeClr val="tx1"/>
-                </a:solidFill>
-              </a:rPr>
-              <a:t>의견·추측의 근거가 있는가(③, 제조사 보증 안내)</a:t>
-            </a:r>
-            <a:endParaRPr lang="en-US" sz="1050" dirty="0"/>
-          </a:p>
-        </p:txBody>
-      </p:sp>
-      <p:sp>
-        <p:nvSpPr>
-          <p:cNvPr id="25" name="Slide Number Placeholder 0"/>
-          <p:cNvSpPr>
-            <a:spLocks noGrp="1"/>
-          </p:cNvSpPr>
-          <p:nvPr>
-            <p:ph type="sldNum" sz="quarter" idx="4294967295"/>
-          </p:nvPr>
-        </p:nvSpPr>
-        <p:spPr>
-          <a:xfrm>
-            <a:off x="8229600" y="4754880"/>
-            <a:ext cx="457200" cy="228600"/>
-          </a:xfrm>
-          <a:prstGeom prst="rect">
-            <a:avLst/>
-          </a:prstGeom>
-          <a:extLst>
-            <a:ext uri="{C572A759-6A51-4108-AA02-DFA0A04FC94B}">
-              <ma14:wrappingTextBoxFlag xmlns:ma14="http://schemas.microsoft.com/office/mac/drawingml/2011/main" val="0"/>
-            </a:ext>
-          </a:extLst>
-        </p:spPr>
-        <p:txBody>
-          <a:bodyPr/>
-          <a:lstStyle>
-            <a:lvl1pPr>
-              <a:defRPr sz="900">
-                <a:solidFill>
-                  <a:srgbClr val="6B6759"/>
-                </a:solidFill>
-              </a:defRPr>
-            </a:lvl1pPr>
-          </a:lstStyle>
-          <a:p>
-            <a:pPr algn="r"/>
-            <a:fld id="{F7021451-1387-4CA6-816F-3879F97B5CBC}" type="slidenum">
-              <a:rPr b="0" lang="en-US"/>
-              <a:t>6</a:t>
-            </a:fld>
-            <a:endParaRPr lang="en-US"/>
-          </a:p>
-        </p:txBody>
-      </p:sp>
-    </p:spTree>
-  </p:cSld>
-  <p:clrMapOvr>
-    <a:masterClrMapping/>
-  </p:clrMapOvr>
-</p:sld>
-</file>
-
-<file path=ppt/slides/slide7.xml><?xml version="1.0" encoding="utf-8"?>
-<p:sld xmlns:a="http://schemas.openxmlformats.org/drawingml/2006/main" xmlns:r="http://schemas.openxmlformats.org/officeDocument/2006/relationships" xmlns:p="http://schemas.openxmlformats.org/presentationml/2006/main">
-  <p:cSld name="Slide 7">
+  <p:cSld name="Slide 4">
     <p:spTree>
       <p:nvGrpSpPr>
         <p:cNvPr id="1" name=""/>
@@ -10515,7 +8004,7 @@
                   <a:schemeClr val="tx1"/>
                 </a:solidFill>
               </a:rPr>
-              <a:t>해마다 15.1만 대(2022~2024년 평균)씩 늘면 2030년 누적은 약 165만 대다. 보증이 끝나는 배터리는 2030년 전후부터 해마다 10만 개를 넘고(2021년 9.6만, 2022년 15.9만 대 등록분) 그 뒤로도 줄지 않는다. 배터리를 진단·수리·재활용하는 기술자가 지금보다 훨씬 많이 필요하다.</a:t>
+              <a:t>배터리 보증은 현대·기아 10년/20만km, 테슬라 8년/16만km. 보증이 끝나는 배터리 수는 8~10년 전 그해 등록 대수와 같으므로, 2021~2023년 등록분(9.6·15.9·15.4만 대)이 2029~2033년에 차례로 만료된다.</a:t>
             </a:r>
             <a:endParaRPr lang="en-US" sz="1300" dirty="0"/>
           </a:p>
@@ -10616,7 +8105,7 @@
                   <a:schemeClr val="tx1"/>
                 </a:solidFill>
               </a:rPr>
-              <a:t>나는 배터리 공학(전기·화학공학과) 진학을 희망한다. 학교 진로 시간에 전기차 정비·배터리 재활용 직업을 소개하는 자료를 만들어 공유하겠다.</a:t>
+              <a:t>2030년 전후부터 해마다 10만 개 넘는 배터리가 점검·교체·재활용 대상이 되어 기술자가 부족해진다. 배터리를 진단·수리·재활용할 기술자를 지금부터 길러야 한다.</a:t>
             </a:r>
             <a:endParaRPr lang="en-US" sz="1300" dirty="0"/>
           </a:p>
@@ -10661,670 +8150,7 @@
             <a:pPr algn="r"/>
             <a:fld id="{F7021451-1387-4CA6-816F-3879F97B5CBC}" type="slidenum">
               <a:rPr b="0" lang="en-US"/>
-              <a:t>7</a:t>
-            </a:fld>
-            <a:endParaRPr lang="en-US"/>
-          </a:p>
-        </p:txBody>
-      </p:sp>
-    </p:spTree>
-  </p:cSld>
-  <p:clrMapOvr>
-    <a:masterClrMapping/>
-  </p:clrMapOvr>
-</p:sld>
-</file>
-
-<file path=ppt/slides/slide8.xml><?xml version="1.0" encoding="utf-8"?>
-<p:sld xmlns:a="http://schemas.openxmlformats.org/drawingml/2006/main" xmlns:r="http://schemas.openxmlformats.org/officeDocument/2006/relationships" xmlns:p="http://schemas.openxmlformats.org/presentationml/2006/main">
-  <p:cSld name="Slide 8">
-    <p:spTree>
-      <p:nvGrpSpPr>
-        <p:cNvPr id="1" name=""/>
-        <p:cNvGrpSpPr/>
-        <p:nvPr/>
-      </p:nvGrpSpPr>
-      <p:grpSpPr>
-        <a:xfrm>
-          <a:off x="0" y="0"/>
-          <a:ext cx="0" cy="0"/>
-          <a:chOff x="0" y="0"/>
-          <a:chExt cx="0" cy="0"/>
-        </a:xfrm>
-      </p:grpSpPr>
-      <p:sp>
-        <p:nvSpPr>
-          <p:cNvPr id="2" name="Text 0"/>
-          <p:cNvSpPr/>
-          <p:nvPr>
-            <p:ph idx="100" type="title" hasCustomPrompt="1"/>
-          </p:nvPr>
-        </p:nvSpPr>
-        <p:spPr>
-          <a:xfrm>
-            <a:off x="960120" y="274320"/>
-            <a:ext cx="7726680" cy="548640"/>
-          </a:xfrm>
-          <a:prstGeom prst="rect">
-            <a:avLst/>
-          </a:prstGeom>
-          <a:noFill/>
-          <a:ln/>
-        </p:spPr>
-        <p:txBody>
-          <a:bodyPr wrap="square" lIns="0" tIns="0" rIns="0" bIns="0" rtlCol="0" anchor="ctr"/>
-          <a:lstStyle/>
-          <a:p>
-            <a:pPr algn="l" indent="0" marL="0">
-              <a:buNone/>
-            </a:pPr>
-            <a:r>
-              <a:rPr lang="en-US" sz="2400" b="1" dirty="0">
-                <a:solidFill>
-                  <a:schemeClr val="tx2"/>
-                </a:solidFill>
-              </a:rPr>
-              <a:t>4장 설명 · 핵심 요약</a:t>
-            </a:r>
-            <a:endParaRPr lang="en-US" sz="2400" dirty="0"/>
-          </a:p>
-        </p:txBody>
-      </p:sp>
-      <p:sp>
-        <p:nvSpPr>
-          <p:cNvPr id="3" name="설명 배지 4"/>
-          <p:cNvSpPr/>
-          <p:nvPr/>
-        </p:nvSpPr>
-        <p:spPr>
-          <a:xfrm>
-            <a:off x="457200" y="384048"/>
-            <a:ext cx="420624" cy="329184"/>
-          </a:xfrm>
-          <a:prstGeom prst="roundRect">
-            <a:avLst>
-              <a:gd name="adj" fmla="val 22222"/>
-            </a:avLst>
-          </a:prstGeom>
-          <a:solidFill>
-            <a:schemeClr val="accent1"/>
-          </a:solidFill>
-          <a:ln w="12700">
-            <a:solidFill>
-              <a:schemeClr val="accent1"/>
-            </a:solidFill>
-            <a:prstDash val="solid"/>
-          </a:ln>
-        </p:spPr>
-      </p:sp>
-      <p:sp>
-        <p:nvSpPr>
-          <p:cNvPr id="4" name="설명 배지 글자 4"/>
-          <p:cNvSpPr txBox="1"/>
-          <p:nvPr/>
-        </p:nvSpPr>
-        <p:spPr>
-          <a:xfrm>
-            <a:off x="457200" y="384048"/>
-            <a:ext cx="420624" cy="329184"/>
-          </a:xfrm>
-          <a:prstGeom prst="rect">
-            <a:avLst/>
-          </a:prstGeom>
-          <a:noFill/>
-          <a:ln/>
-        </p:spPr>
-        <p:txBody>
-          <a:bodyPr wrap="square" lIns="0" tIns="0" rIns="0" bIns="0" rtlCol="0" anchor="ctr"/>
-          <a:lstStyle/>
-          <a:p>
-            <a:pPr algn="ctr" indent="0" marL="0">
-              <a:buNone/>
-            </a:pPr>
-            <a:r>
-              <a:rPr lang="en-US" sz="1000" b="1" dirty="0">
-                <a:solidFill>
-                  <a:schemeClr val="bg1"/>
-                </a:solidFill>
-              </a:rPr>
-              <a:t>설명</a:t>
-            </a:r>
-            <a:endParaRPr lang="en-US" sz="1000" dirty="0"/>
-          </a:p>
-        </p:txBody>
-      </p:sp>
-      <p:sp>
-        <p:nvSpPr>
-          <p:cNvPr id="5" name="설명 카드 4-1"/>
-          <p:cNvSpPr/>
-          <p:nvPr/>
-        </p:nvSpPr>
-        <p:spPr>
-          <a:xfrm>
-            <a:off x="457200" y="960120"/>
-            <a:ext cx="4023360" cy="1691640"/>
-          </a:xfrm>
-          <a:prstGeom prst="roundRect">
-            <a:avLst>
-              <a:gd name="adj" fmla="val 3243"/>
-            </a:avLst>
-          </a:prstGeom>
-          <a:solidFill>
-            <a:srgbClr val="FFFFFF"/>
-          </a:solidFill>
-          <a:ln w="9525">
-            <a:solidFill>
-              <a:srgbClr val="DCE5DF"/>
-            </a:solidFill>
-            <a:prstDash val="solid"/>
-          </a:ln>
-        </p:spPr>
-      </p:sp>
-      <p:sp>
-        <p:nvSpPr>
-          <p:cNvPr id="6" name="설명 제목 4-1"/>
-          <p:cNvSpPr txBox="1"/>
-          <p:nvPr/>
-        </p:nvSpPr>
-        <p:spPr>
-          <a:xfrm>
-            <a:off x="621792" y="1051560"/>
-            <a:ext cx="3657600" cy="274320"/>
-          </a:xfrm>
-          <a:prstGeom prst="rect">
-            <a:avLst/>
-          </a:prstGeom>
-          <a:noFill/>
-          <a:ln/>
-        </p:spPr>
-        <p:txBody>
-          <a:bodyPr wrap="square" lIns="0" tIns="0" rIns="0" bIns="0" rtlCol="0" anchor="ctr"/>
-          <a:lstStyle/>
-          <a:p>
-            <a:pPr indent="0" marL="0">
-              <a:buNone/>
-            </a:pPr>
-            <a:r>
-              <a:rPr lang="en-US" sz="1150" b="1" dirty="0">
-                <a:solidFill>
-                  <a:schemeClr val="tx2"/>
-                </a:solidFill>
-              </a:rPr>
-              <a:t>결론의 구조</a:t>
-            </a:r>
-            <a:endParaRPr lang="en-US" sz="1150" dirty="0"/>
-          </a:p>
-        </p:txBody>
-      </p:sp>
-      <p:sp>
-        <p:nvSpPr>
-          <p:cNvPr id="7" name="설명 내용 4-1"/>
-          <p:cNvSpPr txBox="1"/>
-          <p:nvPr/>
-        </p:nvSpPr>
-        <p:spPr>
-          <a:xfrm>
-            <a:off x="621792" y="1344168"/>
-            <a:ext cx="3703320" cy="1234440"/>
-          </a:xfrm>
-          <a:prstGeom prst="rect">
-            <a:avLst/>
-          </a:prstGeom>
-          <a:noFill/>
-          <a:ln/>
-        </p:spPr>
-        <p:txBody>
-          <a:bodyPr wrap="square" lIns="0" tIns="0" rIns="0" bIns="0" rtlCol="0" anchor="t">
-            <a:normAutofit/>
-          </a:bodyPr>
-          <a:lstStyle/>
-          <a:p>
-            <a:pPr marL="342900" indent="-342900">
-              <a:spcAft>
-                <a:spcPts val="300"/>
-              </a:spcAft>
-              <a:buSzPct val="100000"/>
-              <a:buChar char="•"/>
-            </a:pPr>
-            <a:r>
-              <a:rPr lang="en-US" sz="1050" dirty="0">
-                <a:solidFill>
-                  <a:schemeClr val="tx1"/>
-                </a:solidFill>
-              </a:rPr>
-              <a:t>통계가 보여 준 것(숫자) → 통계 분석(전망 + 수요) → 결론(내가 할 일)</a:t>
-            </a:r>
-            <a:endParaRPr lang="en-US" sz="1050" dirty="0"/>
-          </a:p>
-          <a:p>
-            <a:pPr marL="342900" indent="-342900">
-              <a:spcAft>
-                <a:spcPts val="300"/>
-              </a:spcAft>
-              <a:buSzPct val="100000"/>
-              <a:buChar char="•"/>
-            </a:pPr>
-            <a:r>
-              <a:rPr lang="en-US" sz="1050" dirty="0">
-                <a:solidFill>
-                  <a:schemeClr val="tx1"/>
-                </a:solidFill>
-              </a:rPr>
-              <a:t>통계 분석에 '2030년 약 165만 대', '해마다 10만 개 이상'처럼 숫자를 넣었다</a:t>
-            </a:r>
-            <a:endParaRPr lang="en-US" sz="1050" dirty="0"/>
-          </a:p>
-        </p:txBody>
-      </p:sp>
-      <p:sp>
-        <p:nvSpPr>
-          <p:cNvPr id="8" name="설명 카드 4-2"/>
-          <p:cNvSpPr/>
-          <p:nvPr/>
-        </p:nvSpPr>
-        <p:spPr>
-          <a:xfrm>
-            <a:off x="4663440" y="960120"/>
-            <a:ext cx="4023360" cy="1691640"/>
-          </a:xfrm>
-          <a:prstGeom prst="roundRect">
-            <a:avLst>
-              <a:gd name="adj" fmla="val 3243"/>
-            </a:avLst>
-          </a:prstGeom>
-          <a:solidFill>
-            <a:srgbClr val="FFFFFF"/>
-          </a:solidFill>
-          <a:ln w="9525">
-            <a:solidFill>
-              <a:srgbClr val="DCE5DF"/>
-            </a:solidFill>
-            <a:prstDash val="solid"/>
-          </a:ln>
-        </p:spPr>
-      </p:sp>
-      <p:sp>
-        <p:nvSpPr>
-          <p:cNvPr id="9" name="설명 제목 4-2"/>
-          <p:cNvSpPr txBox="1"/>
-          <p:nvPr/>
-        </p:nvSpPr>
-        <p:spPr>
-          <a:xfrm>
-            <a:off x="4828032" y="1051560"/>
-            <a:ext cx="3657600" cy="274320"/>
-          </a:xfrm>
-          <a:prstGeom prst="rect">
-            <a:avLst/>
-          </a:prstGeom>
-          <a:noFill/>
-          <a:ln/>
-        </p:spPr>
-        <p:txBody>
-          <a:bodyPr wrap="square" lIns="0" tIns="0" rIns="0" bIns="0" rtlCol="0" anchor="ctr"/>
-          <a:lstStyle/>
-          <a:p>
-            <a:pPr indent="0" marL="0">
-              <a:buNone/>
-            </a:pPr>
-            <a:r>
-              <a:rPr lang="en-US" sz="1150" b="1" dirty="0">
-                <a:solidFill>
-                  <a:schemeClr val="tx2"/>
-                </a:solidFill>
-              </a:rPr>
-              <a:t>전망의 가정을 밝힌다</a:t>
-            </a:r>
-            <a:endParaRPr lang="en-US" sz="1150" dirty="0"/>
-          </a:p>
-        </p:txBody>
-      </p:sp>
-      <p:sp>
-        <p:nvSpPr>
-          <p:cNvPr id="10" name="설명 내용 4-2"/>
-          <p:cNvSpPr txBox="1"/>
-          <p:nvPr/>
-        </p:nvSpPr>
-        <p:spPr>
-          <a:xfrm>
-            <a:off x="4828032" y="1344168"/>
-            <a:ext cx="3703320" cy="1234440"/>
-          </a:xfrm>
-          <a:prstGeom prst="rect">
-            <a:avLst/>
-          </a:prstGeom>
-          <a:noFill/>
-          <a:ln/>
-        </p:spPr>
-        <p:txBody>
-          <a:bodyPr wrap="square" lIns="0" tIns="0" rIns="0" bIns="0" rtlCol="0" anchor="t">
-            <a:normAutofit/>
-          </a:bodyPr>
-          <a:lstStyle/>
-          <a:p>
-            <a:pPr marL="342900" indent="-342900">
-              <a:spcAft>
-                <a:spcPts val="300"/>
-              </a:spcAft>
-              <a:buSzPct val="100000"/>
-              <a:buChar char="•"/>
-            </a:pPr>
-            <a:r>
-              <a:rPr lang="en-US" sz="1050" dirty="0">
-                <a:solidFill>
-                  <a:schemeClr val="tx1"/>
-                </a:solidFill>
-              </a:rPr>
-              <a:t>'해마다 15만 대'는 2022~2024년 평균(15.1만 대)을 그대로 이어 간 가정</a:t>
-            </a:r>
-            <a:endParaRPr lang="en-US" sz="1050" dirty="0"/>
-          </a:p>
-          <a:p>
-            <a:pPr marL="342900" indent="-342900">
-              <a:spcAft>
-                <a:spcPts val="300"/>
-              </a:spcAft>
-              <a:buSzPct val="100000"/>
-              <a:buChar char="•"/>
-            </a:pPr>
-            <a:r>
-              <a:rPr lang="en-US" sz="1050" dirty="0">
-                <a:solidFill>
-                  <a:schemeClr val="tx1"/>
-                </a:solidFill>
-              </a:rPr>
-              <a:t>가정을 밝히면 과장이 아니다(스밀의 경고)</a:t>
-            </a:r>
-            <a:endParaRPr lang="en-US" sz="1050" dirty="0"/>
-          </a:p>
-        </p:txBody>
-      </p:sp>
-      <p:sp>
-        <p:nvSpPr>
-          <p:cNvPr id="11" name="설명 카드 4-3"/>
-          <p:cNvSpPr/>
-          <p:nvPr/>
-        </p:nvSpPr>
-        <p:spPr>
-          <a:xfrm>
-            <a:off x="457200" y="2788920"/>
-            <a:ext cx="4023360" cy="1691640"/>
-          </a:xfrm>
-          <a:prstGeom prst="roundRect">
-            <a:avLst>
-              <a:gd name="adj" fmla="val 3243"/>
-            </a:avLst>
-          </a:prstGeom>
-          <a:solidFill>
-            <a:srgbClr val="FFFFFF"/>
-          </a:solidFill>
-          <a:ln w="9525">
-            <a:solidFill>
-              <a:srgbClr val="DCE5DF"/>
-            </a:solidFill>
-            <a:prstDash val="solid"/>
-          </a:ln>
-        </p:spPr>
-      </p:sp>
-      <p:sp>
-        <p:nvSpPr>
-          <p:cNvPr id="12" name="설명 제목 4-3"/>
-          <p:cNvSpPr txBox="1"/>
-          <p:nvPr/>
-        </p:nvSpPr>
-        <p:spPr>
-          <a:xfrm>
-            <a:off x="621792" y="2880360"/>
-            <a:ext cx="3657600" cy="274320"/>
-          </a:xfrm>
-          <a:prstGeom prst="rect">
-            <a:avLst/>
-          </a:prstGeom>
-          <a:noFill/>
-          <a:ln/>
-        </p:spPr>
-        <p:txBody>
-          <a:bodyPr wrap="square" lIns="0" tIns="0" rIns="0" bIns="0" rtlCol="0" anchor="ctr"/>
-          <a:lstStyle/>
-          <a:p>
-            <a:pPr indent="0" marL="0">
-              <a:buNone/>
-            </a:pPr>
-            <a:r>
-              <a:rPr lang="en-US" sz="1150" b="1" dirty="0">
-                <a:solidFill>
-                  <a:schemeClr val="tx2"/>
-                </a:solidFill>
-              </a:rPr>
-              <a:t>효과 숫자의 근거</a:t>
-            </a:r>
-            <a:endParaRPr lang="en-US" sz="1150" dirty="0"/>
-          </a:p>
-        </p:txBody>
-      </p:sp>
-      <p:sp>
-        <p:nvSpPr>
-          <p:cNvPr id="13" name="설명 내용 4-3"/>
-          <p:cNvSpPr txBox="1"/>
-          <p:nvPr/>
-        </p:nvSpPr>
-        <p:spPr>
-          <a:xfrm>
-            <a:off x="621792" y="3172968"/>
-            <a:ext cx="3703320" cy="1234440"/>
-          </a:xfrm>
-          <a:prstGeom prst="rect">
-            <a:avLst/>
-          </a:prstGeom>
-          <a:noFill/>
-          <a:ln/>
-        </p:spPr>
-        <p:txBody>
-          <a:bodyPr wrap="square" lIns="0" tIns="0" rIns="0" bIns="0" rtlCol="0" anchor="t">
-            <a:normAutofit/>
-          </a:bodyPr>
-          <a:lstStyle/>
-          <a:p>
-            <a:pPr marL="342900" indent="-342900">
-              <a:spcAft>
-                <a:spcPts val="300"/>
-              </a:spcAft>
-              <a:buSzPct val="100000"/>
-              <a:buChar char="•"/>
-            </a:pPr>
-            <a:r>
-              <a:rPr lang="en-US" sz="1050" dirty="0">
-                <a:solidFill>
-                  <a:schemeClr val="tx1"/>
-                </a:solidFill>
-              </a:rPr>
-              <a:t>보증이 끝나는 배터리 수 = 8~10년 전 그해 등록 대수</a:t>
-            </a:r>
-            <a:endParaRPr lang="en-US" sz="1050" dirty="0"/>
-          </a:p>
-          <a:p>
-            <a:pPr marL="342900" indent="-342900">
-              <a:spcAft>
-                <a:spcPts val="300"/>
-              </a:spcAft>
-              <a:buSzPct val="100000"/>
-              <a:buChar char="•"/>
-            </a:pPr>
-            <a:r>
-              <a:rPr lang="en-US" sz="1050" dirty="0">
-                <a:solidFill>
-                  <a:schemeClr val="tx1"/>
-                </a:solidFill>
-              </a:rPr>
-              <a:t>2021년 9.6만, 2022년 15.9만, 2023년 15.4만 대 → 2030년 전후 연 10만 개 이상</a:t>
-            </a:r>
-            <a:endParaRPr lang="en-US" sz="1050" dirty="0"/>
-          </a:p>
-        </p:txBody>
-      </p:sp>
-      <p:sp>
-        <p:nvSpPr>
-          <p:cNvPr id="14" name="설명 카드 4-4"/>
-          <p:cNvSpPr/>
-          <p:nvPr/>
-        </p:nvSpPr>
-        <p:spPr>
-          <a:xfrm>
-            <a:off x="4663440" y="2788920"/>
-            <a:ext cx="4023360" cy="1691640"/>
-          </a:xfrm>
-          <a:prstGeom prst="roundRect">
-            <a:avLst>
-              <a:gd name="adj" fmla="val 3243"/>
-            </a:avLst>
-          </a:prstGeom>
-          <a:solidFill>
-            <a:srgbClr val="FFFFFF"/>
-          </a:solidFill>
-          <a:ln w="9525">
-            <a:solidFill>
-              <a:srgbClr val="DCE5DF"/>
-            </a:solidFill>
-            <a:prstDash val="solid"/>
-          </a:ln>
-        </p:spPr>
-      </p:sp>
-      <p:sp>
-        <p:nvSpPr>
-          <p:cNvPr id="15" name="설명 제목 4-4"/>
-          <p:cNvSpPr txBox="1"/>
-          <p:nvPr/>
-        </p:nvSpPr>
-        <p:spPr>
-          <a:xfrm>
-            <a:off x="4828032" y="2880360"/>
-            <a:ext cx="3657600" cy="274320"/>
-          </a:xfrm>
-          <a:prstGeom prst="rect">
-            <a:avLst/>
-          </a:prstGeom>
-          <a:noFill/>
-          <a:ln/>
-        </p:spPr>
-        <p:txBody>
-          <a:bodyPr wrap="square" lIns="0" tIns="0" rIns="0" bIns="0" rtlCol="0" anchor="ctr"/>
-          <a:lstStyle/>
-          <a:p>
-            <a:pPr indent="0" marL="0">
-              <a:buNone/>
-            </a:pPr>
-            <a:r>
-              <a:rPr lang="en-US" sz="1150" b="1" dirty="0">
-                <a:solidFill>
-                  <a:schemeClr val="tx2"/>
-                </a:solidFill>
-              </a:rPr>
-              <a:t>채점 연결</a:t>
-            </a:r>
-            <a:endParaRPr lang="en-US" sz="1150" dirty="0"/>
-          </a:p>
-        </p:txBody>
-      </p:sp>
-      <p:sp>
-        <p:nvSpPr>
-          <p:cNvPr id="16" name="설명 내용 4-4"/>
-          <p:cNvSpPr txBox="1"/>
-          <p:nvPr/>
-        </p:nvSpPr>
-        <p:spPr>
-          <a:xfrm>
-            <a:off x="4828032" y="3172968"/>
-            <a:ext cx="3703320" cy="1234440"/>
-          </a:xfrm>
-          <a:prstGeom prst="rect">
-            <a:avLst/>
-          </a:prstGeom>
-          <a:noFill/>
-          <a:ln/>
-        </p:spPr>
-        <p:txBody>
-          <a:bodyPr wrap="square" lIns="0" tIns="0" rIns="0" bIns="0" rtlCol="0" anchor="t">
-            <a:normAutofit/>
-          </a:bodyPr>
-          <a:lstStyle/>
-          <a:p>
-            <a:pPr marL="342900" indent="-342900">
-              <a:spcAft>
-                <a:spcPts val="300"/>
-              </a:spcAft>
-              <a:buSzPct val="100000"/>
-              <a:buChar char="•"/>
-            </a:pPr>
-            <a:r>
-              <a:rPr lang="en-US" sz="1050" dirty="0">
-                <a:solidFill>
-                  <a:schemeClr val="tx1"/>
-                </a:solidFill>
-              </a:rPr>
-              <a:t>4번 발표 20점: 출처·표·그래프·해석이 모두 나오고 결론이 자세할 때</a:t>
-            </a:r>
-            <a:endParaRPr lang="en-US" sz="1050" dirty="0"/>
-          </a:p>
-          <a:p>
-            <a:pPr marL="342900" indent="-342900">
-              <a:spcAft>
-                <a:spcPts val="300"/>
-              </a:spcAft>
-              <a:buSzPct val="100000"/>
-              <a:buChar char="•"/>
-            </a:pPr>
-            <a:r>
-              <a:rPr lang="en-US" sz="1050" dirty="0">
-                <a:solidFill>
-                  <a:schemeClr val="tx1"/>
-                </a:solidFill>
-              </a:rPr>
-              <a:t>결론이 한 문장이면 15점</a:t>
-            </a:r>
-            <a:endParaRPr lang="en-US" sz="1050" dirty="0"/>
-          </a:p>
-        </p:txBody>
-      </p:sp>
-      <p:sp>
-        <p:nvSpPr>
-          <p:cNvPr id="25" name="Slide Number Placeholder 0"/>
-          <p:cNvSpPr>
-            <a:spLocks noGrp="1"/>
-          </p:cNvSpPr>
-          <p:nvPr>
-            <p:ph type="sldNum" sz="quarter" idx="4294967295"/>
-          </p:nvPr>
-        </p:nvSpPr>
-        <p:spPr>
-          <a:xfrm>
-            <a:off x="8229600" y="4754880"/>
-            <a:ext cx="457200" cy="228600"/>
-          </a:xfrm>
-          <a:prstGeom prst="rect">
-            <a:avLst/>
-          </a:prstGeom>
-          <a:extLst>
-            <a:ext uri="{C572A759-6A51-4108-AA02-DFA0A04FC94B}">
-              <ma14:wrappingTextBoxFlag xmlns:ma14="http://schemas.microsoft.com/office/mac/drawingml/2011/main" val="0"/>
-            </a:ext>
-          </a:extLst>
-        </p:spPr>
-        <p:txBody>
-          <a:bodyPr/>
-          <a:lstStyle>
-            <a:lvl1pPr>
-              <a:defRPr sz="900">
-                <a:solidFill>
-                  <a:srgbClr val="6B6759"/>
-                </a:solidFill>
-              </a:defRPr>
-            </a:lvl1pPr>
-          </a:lstStyle>
-          <a:p>
-            <a:pPr algn="r"/>
-            <a:fld id="{F7021451-1387-4CA6-816F-3879F97B5CBC}" type="slidenum">
-              <a:rPr b="0" lang="en-US"/>
-              <a:t>8</a:t>
+              <a:t>4</a:t>
             </a:fld>
             <a:endParaRPr lang="en-US"/>
           </a:p>
